--- a/docs/pptx/auc3/ritu-auc3-linsubhr-dosedisc-aki2.pptx
+++ b/docs/pptx/auc3/ritu-auc3-linsubhr-dosedisc-aki2.pptx
@@ -2443,7 +2443,7 @@
           </p:nvSpPr>
           <p:spPr>
             <a:xfrm>
-              <a:off x="980186" y="1896563"/>
+              <a:off x="980739" y="1896563"/>
               <a:ext cx="0" cy="3826579"/>
             </a:xfrm>
             <a:custGeom>
@@ -2486,7 +2486,7 @@
           </p:nvSpPr>
           <p:spPr>
             <a:xfrm>
-              <a:off x="3262630" y="1896563"/>
+              <a:off x="3260798" y="1896563"/>
               <a:ext cx="0" cy="3826579"/>
             </a:xfrm>
             <a:custGeom>
@@ -2529,7 +2529,7 @@
           </p:nvSpPr>
           <p:spPr>
             <a:xfrm>
-              <a:off x="5545073" y="1896563"/>
+              <a:off x="5540858" y="1896563"/>
               <a:ext cx="0" cy="3826579"/>
             </a:xfrm>
             <a:custGeom>
@@ -2572,7 +2572,7 @@
           </p:nvSpPr>
           <p:spPr>
             <a:xfrm>
-              <a:off x="7827517" y="1896563"/>
+              <a:off x="7820918" y="1896563"/>
               <a:ext cx="0" cy="3826579"/>
             </a:xfrm>
             <a:custGeom>
@@ -2830,7 +2830,7 @@
           </p:nvSpPr>
           <p:spPr>
             <a:xfrm>
-              <a:off x="2121408" y="1896563"/>
+              <a:off x="2120768" y="1896563"/>
               <a:ext cx="0" cy="3826579"/>
             </a:xfrm>
             <a:custGeom>
@@ -2873,7 +2873,7 @@
           </p:nvSpPr>
           <p:spPr>
             <a:xfrm>
-              <a:off x="4403852" y="1896563"/>
+              <a:off x="4400828" y="1896563"/>
               <a:ext cx="0" cy="3826579"/>
             </a:xfrm>
             <a:custGeom>
@@ -2916,7 +2916,7 @@
           </p:nvSpPr>
           <p:spPr>
             <a:xfrm>
-              <a:off x="6686295" y="1896563"/>
+              <a:off x="6680888" y="1896563"/>
               <a:ext cx="0" cy="3826579"/>
             </a:xfrm>
             <a:custGeom>
@@ -2960,527 +2960,524 @@
           <p:spPr>
             <a:xfrm>
               <a:off x="1172049" y="1896563"/>
-              <a:ext cx="7090630" cy="3587446"/>
+              <a:ext cx="7090630" cy="3585456"/>
             </a:xfrm>
             <a:custGeom>
               <a:avLst/>
               <a:pathLst>
-                <a:path w="7090630" h="3587446">
+                <a:path w="7090630" h="3585456">
                   <a:moveTo>
-                    <a:pt x="0" y="1348992"/>
+                    <a:pt x="0" y="1374884"/>
                   </a:moveTo>
                   <a:lnTo>
-                    <a:pt x="71622" y="1398637"/>
-                  </a:lnTo>
-                  <a:lnTo>
-                    <a:pt x="143245" y="1447212"/>
-                  </a:lnTo>
-                  <a:lnTo>
-                    <a:pt x="214867" y="1494740"/>
-                  </a:lnTo>
-                  <a:lnTo>
-                    <a:pt x="286490" y="1541244"/>
-                  </a:lnTo>
-                  <a:lnTo>
-                    <a:pt x="358112" y="1586745"/>
-                  </a:lnTo>
-                  <a:lnTo>
-                    <a:pt x="429735" y="1631266"/>
-                  </a:lnTo>
-                  <a:lnTo>
-                    <a:pt x="501357" y="1674828"/>
-                  </a:lnTo>
-                  <a:lnTo>
-                    <a:pt x="572980" y="1717451"/>
-                  </a:lnTo>
-                  <a:lnTo>
-                    <a:pt x="644602" y="1759155"/>
-                  </a:lnTo>
-                  <a:lnTo>
-                    <a:pt x="716225" y="1799960"/>
-                  </a:lnTo>
-                  <a:lnTo>
-                    <a:pt x="787847" y="1839887"/>
-                  </a:lnTo>
-                  <a:lnTo>
-                    <a:pt x="859470" y="1878952"/>
-                  </a:lnTo>
-                  <a:lnTo>
-                    <a:pt x="931092" y="1917176"/>
-                  </a:lnTo>
-                  <a:lnTo>
-                    <a:pt x="1002715" y="1954576"/>
-                  </a:lnTo>
-                  <a:lnTo>
-                    <a:pt x="1074337" y="1991170"/>
-                  </a:lnTo>
-                  <a:lnTo>
-                    <a:pt x="1145960" y="2026976"/>
-                  </a:lnTo>
-                  <a:lnTo>
-                    <a:pt x="1217582" y="2062010"/>
-                  </a:lnTo>
-                  <a:lnTo>
-                    <a:pt x="1289205" y="2096289"/>
-                  </a:lnTo>
-                  <a:lnTo>
-                    <a:pt x="1360827" y="2129829"/>
-                  </a:lnTo>
-                  <a:lnTo>
-                    <a:pt x="1432450" y="2162646"/>
-                  </a:lnTo>
-                  <a:lnTo>
-                    <a:pt x="1504073" y="2194756"/>
-                  </a:lnTo>
-                  <a:lnTo>
-                    <a:pt x="1575695" y="2226174"/>
-                  </a:lnTo>
-                  <a:lnTo>
-                    <a:pt x="1647318" y="2256915"/>
-                  </a:lnTo>
-                  <a:lnTo>
-                    <a:pt x="1718940" y="2286994"/>
-                  </a:lnTo>
-                  <a:lnTo>
-                    <a:pt x="1790563" y="2316424"/>
-                  </a:lnTo>
-                  <a:lnTo>
-                    <a:pt x="1862185" y="2345220"/>
-                  </a:lnTo>
-                  <a:lnTo>
-                    <a:pt x="1933808" y="2373396"/>
-                  </a:lnTo>
-                  <a:lnTo>
-                    <a:pt x="2005430" y="2400964"/>
-                  </a:lnTo>
-                  <a:lnTo>
-                    <a:pt x="2077053" y="2427939"/>
-                  </a:lnTo>
-                  <a:lnTo>
-                    <a:pt x="2148675" y="2454331"/>
-                  </a:lnTo>
-                  <a:lnTo>
-                    <a:pt x="2220298" y="2480156"/>
-                  </a:lnTo>
-                  <a:lnTo>
-                    <a:pt x="2291920" y="2505423"/>
-                  </a:lnTo>
-                  <a:lnTo>
-                    <a:pt x="2363543" y="2530146"/>
-                  </a:lnTo>
-                  <a:lnTo>
-                    <a:pt x="2435165" y="2554337"/>
-                  </a:lnTo>
-                  <a:lnTo>
-                    <a:pt x="2506788" y="2578006"/>
-                  </a:lnTo>
-                  <a:lnTo>
-                    <a:pt x="2578410" y="2601165"/>
-                  </a:lnTo>
-                  <a:lnTo>
-                    <a:pt x="2650033" y="2623824"/>
-                  </a:lnTo>
-                  <a:lnTo>
-                    <a:pt x="2721655" y="2645996"/>
-                  </a:lnTo>
-                  <a:lnTo>
-                    <a:pt x="2793278" y="2667690"/>
-                  </a:lnTo>
-                  <a:lnTo>
-                    <a:pt x="2864901" y="2688916"/>
-                  </a:lnTo>
-                  <a:lnTo>
-                    <a:pt x="2936523" y="2709685"/>
-                  </a:lnTo>
-                  <a:lnTo>
-                    <a:pt x="3008146" y="2730006"/>
-                  </a:lnTo>
-                  <a:lnTo>
-                    <a:pt x="3079768" y="2749889"/>
-                  </a:lnTo>
-                  <a:lnTo>
-                    <a:pt x="3151391" y="2769344"/>
-                  </a:lnTo>
-                  <a:lnTo>
-                    <a:pt x="3223013" y="2768404"/>
-                  </a:lnTo>
-                  <a:lnTo>
-                    <a:pt x="3294636" y="2715658"/>
-                  </a:lnTo>
-                  <a:lnTo>
-                    <a:pt x="3366258" y="2659766"/>
-                  </a:lnTo>
-                  <a:lnTo>
-                    <a:pt x="3437881" y="2600539"/>
-                  </a:lnTo>
-                  <a:lnTo>
-                    <a:pt x="3509503" y="2537779"/>
-                  </a:lnTo>
-                  <a:lnTo>
-                    <a:pt x="3581126" y="2471276"/>
-                  </a:lnTo>
-                  <a:lnTo>
-                    <a:pt x="3652748" y="2400806"/>
-                  </a:lnTo>
-                  <a:lnTo>
-                    <a:pt x="3724371" y="2326132"/>
-                  </a:lnTo>
-                  <a:lnTo>
-                    <a:pt x="3795993" y="2247004"/>
-                  </a:lnTo>
-                  <a:lnTo>
-                    <a:pt x="3867616" y="2163155"/>
-                  </a:lnTo>
-                  <a:lnTo>
-                    <a:pt x="3939238" y="2074305"/>
-                  </a:lnTo>
-                  <a:lnTo>
-                    <a:pt x="4010861" y="1980155"/>
-                  </a:lnTo>
-                  <a:lnTo>
-                    <a:pt x="4082483" y="1880388"/>
-                  </a:lnTo>
-                  <a:lnTo>
-                    <a:pt x="4154106" y="1774670"/>
-                  </a:lnTo>
-                  <a:lnTo>
-                    <a:pt x="4225729" y="1662646"/>
-                  </a:lnTo>
-                  <a:lnTo>
-                    <a:pt x="4297351" y="1543940"/>
-                  </a:lnTo>
-                  <a:lnTo>
-                    <a:pt x="4368974" y="1418153"/>
-                  </a:lnTo>
-                  <a:lnTo>
-                    <a:pt x="4440596" y="1284862"/>
-                  </a:lnTo>
-                  <a:lnTo>
-                    <a:pt x="4512219" y="1143620"/>
-                  </a:lnTo>
-                  <a:lnTo>
-                    <a:pt x="4583841" y="993954"/>
-                  </a:lnTo>
-                  <a:lnTo>
-                    <a:pt x="4655464" y="835359"/>
-                  </a:lnTo>
-                  <a:lnTo>
-                    <a:pt x="4727086" y="667303"/>
-                  </a:lnTo>
-                  <a:lnTo>
-                    <a:pt x="4798709" y="489223"/>
-                  </a:lnTo>
-                  <a:lnTo>
-                    <a:pt x="4870331" y="300521"/>
-                  </a:lnTo>
-                  <a:lnTo>
-                    <a:pt x="4941954" y="100562"/>
-                  </a:lnTo>
-                  <a:lnTo>
-                    <a:pt x="4975946" y="0"/>
+                    <a:pt x="71622" y="1424021"/>
+                  </a:lnTo>
+                  <a:lnTo>
+                    <a:pt x="143245" y="1472099"/>
+                  </a:lnTo>
+                  <a:lnTo>
+                    <a:pt x="214867" y="1519140"/>
+                  </a:lnTo>
+                  <a:lnTo>
+                    <a:pt x="286490" y="1565165"/>
+                  </a:lnTo>
+                  <a:lnTo>
+                    <a:pt x="358112" y="1610198"/>
+                  </a:lnTo>
+                  <a:lnTo>
+                    <a:pt x="429735" y="1654259"/>
+                  </a:lnTo>
+                  <a:lnTo>
+                    <a:pt x="501357" y="1697370"/>
+                  </a:lnTo>
+                  <a:lnTo>
+                    <a:pt x="572980" y="1739551"/>
+                  </a:lnTo>
+                  <a:lnTo>
+                    <a:pt x="644602" y="1780822"/>
+                  </a:lnTo>
+                  <a:lnTo>
+                    <a:pt x="716225" y="1821202"/>
+                  </a:lnTo>
+                  <a:lnTo>
+                    <a:pt x="787847" y="1860712"/>
+                  </a:lnTo>
+                  <a:lnTo>
+                    <a:pt x="859470" y="1899369"/>
+                  </a:lnTo>
+                  <a:lnTo>
+                    <a:pt x="931092" y="1937192"/>
+                  </a:lnTo>
+                  <a:lnTo>
+                    <a:pt x="1002715" y="1974199"/>
+                  </a:lnTo>
+                  <a:lnTo>
+                    <a:pt x="1074337" y="2010408"/>
+                  </a:lnTo>
+                  <a:lnTo>
+                    <a:pt x="1145960" y="2045836"/>
+                  </a:lnTo>
+                  <a:lnTo>
+                    <a:pt x="1217582" y="2080499"/>
+                  </a:lnTo>
+                  <a:lnTo>
+                    <a:pt x="1289205" y="2114415"/>
+                  </a:lnTo>
+                  <a:lnTo>
+                    <a:pt x="1360827" y="2147598"/>
+                  </a:lnTo>
+                  <a:lnTo>
+                    <a:pt x="1432450" y="2180067"/>
+                  </a:lnTo>
+                  <a:lnTo>
+                    <a:pt x="1504073" y="2211834"/>
+                  </a:lnTo>
+                  <a:lnTo>
+                    <a:pt x="1575695" y="2242917"/>
+                  </a:lnTo>
+                  <a:lnTo>
+                    <a:pt x="1647318" y="2273328"/>
+                  </a:lnTo>
+                  <a:lnTo>
+                    <a:pt x="1718940" y="2303084"/>
+                  </a:lnTo>
+                  <a:lnTo>
+                    <a:pt x="1790563" y="2332198"/>
+                  </a:lnTo>
+                  <a:lnTo>
+                    <a:pt x="1862185" y="2360684"/>
+                  </a:lnTo>
+                  <a:lnTo>
+                    <a:pt x="1933808" y="2388555"/>
+                  </a:lnTo>
+                  <a:lnTo>
+                    <a:pt x="2005430" y="2415825"/>
+                  </a:lnTo>
+                  <a:lnTo>
+                    <a:pt x="2077053" y="2442507"/>
+                  </a:lnTo>
+                  <a:lnTo>
+                    <a:pt x="2148675" y="2468613"/>
+                  </a:lnTo>
+                  <a:lnTo>
+                    <a:pt x="2220298" y="2494156"/>
+                  </a:lnTo>
+                  <a:lnTo>
+                    <a:pt x="2291920" y="2519147"/>
+                  </a:lnTo>
+                  <a:lnTo>
+                    <a:pt x="2363543" y="2543600"/>
+                  </a:lnTo>
+                  <a:lnTo>
+                    <a:pt x="2435165" y="2567525"/>
+                  </a:lnTo>
+                  <a:lnTo>
+                    <a:pt x="2506788" y="2590934"/>
+                  </a:lnTo>
+                  <a:lnTo>
+                    <a:pt x="2578410" y="2613838"/>
+                  </a:lnTo>
+                  <a:lnTo>
+                    <a:pt x="2650033" y="2636248"/>
+                  </a:lnTo>
+                  <a:lnTo>
+                    <a:pt x="2721655" y="2658175"/>
+                  </a:lnTo>
+                  <a:lnTo>
+                    <a:pt x="2793278" y="2679628"/>
+                  </a:lnTo>
+                  <a:lnTo>
+                    <a:pt x="2864901" y="2700619"/>
+                  </a:lnTo>
+                  <a:lnTo>
+                    <a:pt x="2936523" y="2721157"/>
+                  </a:lnTo>
+                  <a:lnTo>
+                    <a:pt x="3008146" y="2741252"/>
+                  </a:lnTo>
+                  <a:lnTo>
+                    <a:pt x="3079768" y="2760913"/>
+                  </a:lnTo>
+                  <a:lnTo>
+                    <a:pt x="3151391" y="2780150"/>
+                  </a:lnTo>
+                  <a:lnTo>
+                    <a:pt x="3223013" y="2738922"/>
+                  </a:lnTo>
+                  <a:lnTo>
+                    <a:pt x="3294636" y="2684359"/>
+                  </a:lnTo>
+                  <a:lnTo>
+                    <a:pt x="3366258" y="2626537"/>
+                  </a:lnTo>
+                  <a:lnTo>
+                    <a:pt x="3437881" y="2565262"/>
+                  </a:lnTo>
+                  <a:lnTo>
+                    <a:pt x="3509503" y="2500328"/>
+                  </a:lnTo>
+                  <a:lnTo>
+                    <a:pt x="3581126" y="2431517"/>
+                  </a:lnTo>
+                  <a:lnTo>
+                    <a:pt x="3652748" y="2358596"/>
+                  </a:lnTo>
+                  <a:lnTo>
+                    <a:pt x="3724371" y="2281321"/>
+                  </a:lnTo>
+                  <a:lnTo>
+                    <a:pt x="3795993" y="2199432"/>
+                  </a:lnTo>
+                  <a:lnTo>
+                    <a:pt x="3867616" y="2112652"/>
+                  </a:lnTo>
+                  <a:lnTo>
+                    <a:pt x="3939238" y="2020690"/>
+                  </a:lnTo>
+                  <a:lnTo>
+                    <a:pt x="4010861" y="1923237"/>
+                  </a:lnTo>
+                  <a:lnTo>
+                    <a:pt x="4082483" y="1819964"/>
+                  </a:lnTo>
+                  <a:lnTo>
+                    <a:pt x="4154106" y="1710524"/>
+                  </a:lnTo>
+                  <a:lnTo>
+                    <a:pt x="4225729" y="1594549"/>
+                  </a:lnTo>
+                  <a:lnTo>
+                    <a:pt x="4297351" y="1471648"/>
+                  </a:lnTo>
+                  <a:lnTo>
+                    <a:pt x="4368974" y="1341408"/>
+                  </a:lnTo>
+                  <a:lnTo>
+                    <a:pt x="4440596" y="1203391"/>
+                  </a:lnTo>
+                  <a:lnTo>
+                    <a:pt x="4512219" y="1057132"/>
+                  </a:lnTo>
+                  <a:lnTo>
+                    <a:pt x="4583841" y="902139"/>
+                  </a:lnTo>
+                  <a:lnTo>
+                    <a:pt x="4655464" y="737890"/>
+                  </a:lnTo>
+                  <a:lnTo>
+                    <a:pt x="4727086" y="563833"/>
+                  </a:lnTo>
+                  <a:lnTo>
+                    <a:pt x="4798709" y="379383"/>
+                  </a:lnTo>
+                  <a:lnTo>
+                    <a:pt x="4870331" y="183917"/>
+                  </a:lnTo>
+                  <a:lnTo>
+                    <a:pt x="4933925" y="0"/>
                   </a:lnTo>
                   <a:lnTo>
                     <a:pt x="7090630" y="0"/>
                   </a:lnTo>
                   <a:lnTo>
-                    <a:pt x="7090630" y="3386128"/>
-                  </a:lnTo>
-                  <a:lnTo>
-                    <a:pt x="7019007" y="3380258"/>
-                  </a:lnTo>
-                  <a:lnTo>
-                    <a:pt x="6947385" y="3374259"/>
-                  </a:lnTo>
-                  <a:lnTo>
-                    <a:pt x="6875762" y="3368127"/>
-                  </a:lnTo>
-                  <a:lnTo>
-                    <a:pt x="6804139" y="3361861"/>
-                  </a:lnTo>
-                  <a:lnTo>
-                    <a:pt x="6732517" y="3355456"/>
-                  </a:lnTo>
-                  <a:lnTo>
-                    <a:pt x="6660894" y="3348911"/>
-                  </a:lnTo>
-                  <a:lnTo>
-                    <a:pt x="6589272" y="3342221"/>
-                  </a:lnTo>
-                  <a:lnTo>
-                    <a:pt x="6517649" y="3335384"/>
-                  </a:lnTo>
-                  <a:lnTo>
-                    <a:pt x="6446027" y="3328396"/>
-                  </a:lnTo>
-                  <a:lnTo>
-                    <a:pt x="6374404" y="3321255"/>
-                  </a:lnTo>
-                  <a:lnTo>
-                    <a:pt x="6302782" y="3313956"/>
-                  </a:lnTo>
-                  <a:lnTo>
-                    <a:pt x="6231159" y="3306496"/>
-                  </a:lnTo>
-                  <a:lnTo>
-                    <a:pt x="6159537" y="3298872"/>
-                  </a:lnTo>
-                  <a:lnTo>
-                    <a:pt x="6087914" y="3291080"/>
-                  </a:lnTo>
-                  <a:lnTo>
-                    <a:pt x="6016292" y="3283117"/>
-                  </a:lnTo>
-                  <a:lnTo>
-                    <a:pt x="5944669" y="3274978"/>
-                  </a:lnTo>
-                  <a:lnTo>
-                    <a:pt x="5873047" y="3266660"/>
-                  </a:lnTo>
-                  <a:lnTo>
-                    <a:pt x="5801424" y="3258159"/>
-                  </a:lnTo>
-                  <a:lnTo>
-                    <a:pt x="5729802" y="3249470"/>
-                  </a:lnTo>
-                  <a:lnTo>
-                    <a:pt x="5658179" y="3240590"/>
-                  </a:lnTo>
-                  <a:lnTo>
-                    <a:pt x="5586557" y="3231515"/>
-                  </a:lnTo>
-                  <a:lnTo>
-                    <a:pt x="5514934" y="3222239"/>
-                  </a:lnTo>
-                  <a:lnTo>
-                    <a:pt x="5443311" y="3212759"/>
-                  </a:lnTo>
-                  <a:lnTo>
-                    <a:pt x="5371689" y="3203071"/>
-                  </a:lnTo>
-                  <a:lnTo>
-                    <a:pt x="5300066" y="3193169"/>
-                  </a:lnTo>
-                  <a:lnTo>
-                    <a:pt x="5228444" y="3183049"/>
-                  </a:lnTo>
-                  <a:lnTo>
-                    <a:pt x="5156821" y="3172706"/>
-                  </a:lnTo>
-                  <a:lnTo>
-                    <a:pt x="5085199" y="3162136"/>
-                  </a:lnTo>
-                  <a:lnTo>
-                    <a:pt x="5013576" y="3151332"/>
-                  </a:lnTo>
-                  <a:lnTo>
-                    <a:pt x="4941954" y="3140291"/>
-                  </a:lnTo>
-                  <a:lnTo>
-                    <a:pt x="4870331" y="3129006"/>
-                  </a:lnTo>
-                  <a:lnTo>
-                    <a:pt x="4798709" y="3117473"/>
-                  </a:lnTo>
-                  <a:lnTo>
-                    <a:pt x="4727086" y="3105686"/>
-                  </a:lnTo>
-                  <a:lnTo>
-                    <a:pt x="4655464" y="3093639"/>
-                  </a:lnTo>
-                  <a:lnTo>
-                    <a:pt x="4583841" y="3081327"/>
-                  </a:lnTo>
-                  <a:lnTo>
-                    <a:pt x="4512219" y="3068744"/>
-                  </a:lnTo>
-                  <a:lnTo>
-                    <a:pt x="4440596" y="3055883"/>
-                  </a:lnTo>
-                  <a:lnTo>
-                    <a:pt x="4368974" y="3042739"/>
-                  </a:lnTo>
-                  <a:lnTo>
-                    <a:pt x="4297351" y="3029306"/>
-                  </a:lnTo>
-                  <a:lnTo>
-                    <a:pt x="4225729" y="3015577"/>
-                  </a:lnTo>
-                  <a:lnTo>
-                    <a:pt x="4154106" y="3001546"/>
-                  </a:lnTo>
-                  <a:lnTo>
-                    <a:pt x="4082483" y="2987205"/>
-                  </a:lnTo>
-                  <a:lnTo>
-                    <a:pt x="4010861" y="2972549"/>
-                  </a:lnTo>
-                  <a:lnTo>
-                    <a:pt x="3939238" y="2957570"/>
-                  </a:lnTo>
-                  <a:lnTo>
-                    <a:pt x="3867616" y="2942261"/>
-                  </a:lnTo>
-                  <a:lnTo>
-                    <a:pt x="3795993" y="2926614"/>
-                  </a:lnTo>
-                  <a:lnTo>
-                    <a:pt x="3724371" y="2910624"/>
-                  </a:lnTo>
-                  <a:lnTo>
-                    <a:pt x="3652748" y="2894280"/>
-                  </a:lnTo>
-                  <a:lnTo>
-                    <a:pt x="3581126" y="2877577"/>
-                  </a:lnTo>
-                  <a:lnTo>
-                    <a:pt x="3509503" y="2860507"/>
-                  </a:lnTo>
-                  <a:lnTo>
-                    <a:pt x="3437881" y="2843060"/>
-                  </a:lnTo>
-                  <a:lnTo>
-                    <a:pt x="3366258" y="2825228"/>
-                  </a:lnTo>
-                  <a:lnTo>
-                    <a:pt x="3294636" y="2807005"/>
-                  </a:lnTo>
-                  <a:lnTo>
-                    <a:pt x="3223013" y="2788379"/>
-                  </a:lnTo>
-                  <a:lnTo>
-                    <a:pt x="3151391" y="2818181"/>
-                  </a:lnTo>
-                  <a:lnTo>
-                    <a:pt x="3079768" y="2865156"/>
-                  </a:lnTo>
-                  <a:lnTo>
-                    <a:pt x="3008146" y="2909487"/>
-                  </a:lnTo>
-                  <a:lnTo>
-                    <a:pt x="2936523" y="2951321"/>
-                  </a:lnTo>
-                  <a:lnTo>
-                    <a:pt x="2864901" y="2990801"/>
-                  </a:lnTo>
-                  <a:lnTo>
-                    <a:pt x="2793278" y="3028059"/>
-                  </a:lnTo>
-                  <a:lnTo>
-                    <a:pt x="2721655" y="3063219"/>
-                  </a:lnTo>
-                  <a:lnTo>
-                    <a:pt x="2650033" y="3096400"/>
-                  </a:lnTo>
-                  <a:lnTo>
-                    <a:pt x="2578410" y="3127712"/>
-                  </a:lnTo>
-                  <a:lnTo>
-                    <a:pt x="2506788" y="3157263"/>
-                  </a:lnTo>
-                  <a:lnTo>
-                    <a:pt x="2435165" y="3185149"/>
-                  </a:lnTo>
-                  <a:lnTo>
-                    <a:pt x="2363543" y="3211466"/>
-                  </a:lnTo>
-                  <a:lnTo>
-                    <a:pt x="2291920" y="3236302"/>
-                  </a:lnTo>
-                  <a:lnTo>
-                    <a:pt x="2220298" y="3259739"/>
-                  </a:lnTo>
-                  <a:lnTo>
-                    <a:pt x="2148675" y="3281857"/>
-                  </a:lnTo>
-                  <a:lnTo>
-                    <a:pt x="2077053" y="3302730"/>
-                  </a:lnTo>
-                  <a:lnTo>
-                    <a:pt x="2005430" y="3322428"/>
-                  </a:lnTo>
-                  <a:lnTo>
-                    <a:pt x="1933808" y="3341017"/>
-                  </a:lnTo>
-                  <a:lnTo>
-                    <a:pt x="1862185" y="3358559"/>
-                  </a:lnTo>
-                  <a:lnTo>
-                    <a:pt x="1790563" y="3375114"/>
-                  </a:lnTo>
-                  <a:lnTo>
-                    <a:pt x="1718940" y="3390737"/>
-                  </a:lnTo>
-                  <a:lnTo>
-                    <a:pt x="1647318" y="3405481"/>
-                  </a:lnTo>
-                  <a:lnTo>
-                    <a:pt x="1575695" y="3419395"/>
-                  </a:lnTo>
-                  <a:lnTo>
-                    <a:pt x="1504073" y="3432525"/>
-                  </a:lnTo>
-                  <a:lnTo>
-                    <a:pt x="1432450" y="3444916"/>
-                  </a:lnTo>
-                  <a:lnTo>
-                    <a:pt x="1360827" y="3456610"/>
-                  </a:lnTo>
-                  <a:lnTo>
-                    <a:pt x="1289205" y="3467645"/>
-                  </a:lnTo>
-                  <a:lnTo>
-                    <a:pt x="1217582" y="3478059"/>
-                  </a:lnTo>
-                  <a:lnTo>
-                    <a:pt x="1145960" y="3487887"/>
-                  </a:lnTo>
-                  <a:lnTo>
-                    <a:pt x="1074337" y="3497162"/>
-                  </a:lnTo>
-                  <a:lnTo>
-                    <a:pt x="1002715" y="3505915"/>
-                  </a:lnTo>
-                  <a:lnTo>
-                    <a:pt x="931092" y="3514175"/>
-                  </a:lnTo>
-                  <a:lnTo>
-                    <a:pt x="859470" y="3521969"/>
-                  </a:lnTo>
-                  <a:lnTo>
-                    <a:pt x="787847" y="3529326"/>
-                  </a:lnTo>
-                  <a:lnTo>
-                    <a:pt x="716225" y="3536268"/>
-                  </a:lnTo>
-                  <a:lnTo>
-                    <a:pt x="644602" y="3542819"/>
-                  </a:lnTo>
-                  <a:lnTo>
-                    <a:pt x="572980" y="3549001"/>
-                  </a:lnTo>
-                  <a:lnTo>
-                    <a:pt x="501357" y="3554836"/>
-                  </a:lnTo>
-                  <a:lnTo>
-                    <a:pt x="429735" y="3560341"/>
-                  </a:lnTo>
-                  <a:lnTo>
-                    <a:pt x="358112" y="3565537"/>
-                  </a:lnTo>
-                  <a:lnTo>
-                    <a:pt x="286490" y="3570441"/>
-                  </a:lnTo>
-                  <a:lnTo>
-                    <a:pt x="214867" y="3575068"/>
-                  </a:lnTo>
-                  <a:lnTo>
-                    <a:pt x="143245" y="3579435"/>
-                  </a:lnTo>
-                  <a:lnTo>
-                    <a:pt x="71622" y="3583556"/>
-                  </a:lnTo>
-                  <a:lnTo>
-                    <a:pt x="0" y="3587446"/>
+                    <a:pt x="7090630" y="3389720"/>
+                  </a:lnTo>
+                  <a:lnTo>
+                    <a:pt x="7019007" y="3383923"/>
+                  </a:lnTo>
+                  <a:lnTo>
+                    <a:pt x="6947385" y="3377998"/>
+                  </a:lnTo>
+                  <a:lnTo>
+                    <a:pt x="6875762" y="3371942"/>
+                  </a:lnTo>
+                  <a:lnTo>
+                    <a:pt x="6804139" y="3365753"/>
+                  </a:lnTo>
+                  <a:lnTo>
+                    <a:pt x="6732517" y="3359428"/>
+                  </a:lnTo>
+                  <a:lnTo>
+                    <a:pt x="6660894" y="3352963"/>
+                  </a:lnTo>
+                  <a:lnTo>
+                    <a:pt x="6589272" y="3346355"/>
+                  </a:lnTo>
+                  <a:lnTo>
+                    <a:pt x="6517649" y="3339602"/>
+                  </a:lnTo>
+                  <a:lnTo>
+                    <a:pt x="6446027" y="3332700"/>
+                  </a:lnTo>
+                  <a:lnTo>
+                    <a:pt x="6374404" y="3325646"/>
+                  </a:lnTo>
+                  <a:lnTo>
+                    <a:pt x="6302782" y="3318436"/>
+                  </a:lnTo>
+                  <a:lnTo>
+                    <a:pt x="6231159" y="3311067"/>
+                  </a:lnTo>
+                  <a:lnTo>
+                    <a:pt x="6159537" y="3303536"/>
+                  </a:lnTo>
+                  <a:lnTo>
+                    <a:pt x="6087914" y="3295839"/>
+                  </a:lnTo>
+                  <a:lnTo>
+                    <a:pt x="6016292" y="3287972"/>
+                  </a:lnTo>
+                  <a:lnTo>
+                    <a:pt x="5944669" y="3279931"/>
+                  </a:lnTo>
+                  <a:lnTo>
+                    <a:pt x="5873047" y="3271713"/>
+                  </a:lnTo>
+                  <a:lnTo>
+                    <a:pt x="5801424" y="3263314"/>
+                  </a:lnTo>
+                  <a:lnTo>
+                    <a:pt x="5729802" y="3254730"/>
+                  </a:lnTo>
+                  <a:lnTo>
+                    <a:pt x="5658179" y="3245957"/>
+                  </a:lnTo>
+                  <a:lnTo>
+                    <a:pt x="5586557" y="3236990"/>
+                  </a:lnTo>
+                  <a:lnTo>
+                    <a:pt x="5514934" y="3227826"/>
+                  </a:lnTo>
+                  <a:lnTo>
+                    <a:pt x="5443311" y="3218459"/>
+                  </a:lnTo>
+                  <a:lnTo>
+                    <a:pt x="5371689" y="3208886"/>
+                  </a:lnTo>
+                  <a:lnTo>
+                    <a:pt x="5300066" y="3199102"/>
+                  </a:lnTo>
+                  <a:lnTo>
+                    <a:pt x="5228444" y="3189102"/>
+                  </a:lnTo>
+                  <a:lnTo>
+                    <a:pt x="5156821" y="3178882"/>
+                  </a:lnTo>
+                  <a:lnTo>
+                    <a:pt x="5085199" y="3168436"/>
+                  </a:lnTo>
+                  <a:lnTo>
+                    <a:pt x="5013576" y="3157760"/>
+                  </a:lnTo>
+                  <a:lnTo>
+                    <a:pt x="4941954" y="3146848"/>
+                  </a:lnTo>
+                  <a:lnTo>
+                    <a:pt x="4870331" y="3135696"/>
+                  </a:lnTo>
+                  <a:lnTo>
+                    <a:pt x="4798709" y="3124298"/>
+                  </a:lnTo>
+                  <a:lnTo>
+                    <a:pt x="4727086" y="3112649"/>
+                  </a:lnTo>
+                  <a:lnTo>
+                    <a:pt x="4655464" y="3100743"/>
+                  </a:lnTo>
+                  <a:lnTo>
+                    <a:pt x="4583841" y="3088575"/>
+                  </a:lnTo>
+                  <a:lnTo>
+                    <a:pt x="4512219" y="3076138"/>
+                  </a:lnTo>
+                  <a:lnTo>
+                    <a:pt x="4440596" y="3063427"/>
+                  </a:lnTo>
+                  <a:lnTo>
+                    <a:pt x="4368974" y="3050435"/>
+                  </a:lnTo>
+                  <a:lnTo>
+                    <a:pt x="4297351" y="3037158"/>
+                  </a:lnTo>
+                  <a:lnTo>
+                    <a:pt x="4225729" y="3023587"/>
+                  </a:lnTo>
+                  <a:lnTo>
+                    <a:pt x="4154106" y="3009717"/>
+                  </a:lnTo>
+                  <a:lnTo>
+                    <a:pt x="4082483" y="2995542"/>
+                  </a:lnTo>
+                  <a:lnTo>
+                    <a:pt x="4010861" y="2981054"/>
+                  </a:lnTo>
+                  <a:lnTo>
+                    <a:pt x="3939238" y="2966246"/>
+                  </a:lnTo>
+                  <a:lnTo>
+                    <a:pt x="3867616" y="2951112"/>
+                  </a:lnTo>
+                  <a:lnTo>
+                    <a:pt x="3795993" y="2935644"/>
+                  </a:lnTo>
+                  <a:lnTo>
+                    <a:pt x="3724371" y="2919836"/>
+                  </a:lnTo>
+                  <a:lnTo>
+                    <a:pt x="3652748" y="2903678"/>
+                  </a:lnTo>
+                  <a:lnTo>
+                    <a:pt x="3581126" y="2887165"/>
+                  </a:lnTo>
+                  <a:lnTo>
+                    <a:pt x="3509503" y="2870287"/>
+                  </a:lnTo>
+                  <a:lnTo>
+                    <a:pt x="3437881" y="2853037"/>
+                  </a:lnTo>
+                  <a:lnTo>
+                    <a:pt x="3366258" y="2835407"/>
+                  </a:lnTo>
+                  <a:lnTo>
+                    <a:pt x="3294636" y="2817389"/>
+                  </a:lnTo>
+                  <a:lnTo>
+                    <a:pt x="3223013" y="2798972"/>
+                  </a:lnTo>
+                  <a:lnTo>
+                    <a:pt x="3151391" y="2790411"/>
+                  </a:lnTo>
+                  <a:lnTo>
+                    <a:pt x="3079768" y="2838999"/>
+                  </a:lnTo>
+                  <a:lnTo>
+                    <a:pt x="3008146" y="2884848"/>
+                  </a:lnTo>
+                  <a:lnTo>
+                    <a:pt x="2936523" y="2928114"/>
+                  </a:lnTo>
+                  <a:lnTo>
+                    <a:pt x="2864901" y="2968942"/>
+                  </a:lnTo>
+                  <a:lnTo>
+                    <a:pt x="2793278" y="3007469"/>
+                  </a:lnTo>
+                  <a:lnTo>
+                    <a:pt x="2721655" y="3043825"/>
+                  </a:lnTo>
+                  <a:lnTo>
+                    <a:pt x="2650033" y="3078132"/>
+                  </a:lnTo>
+                  <a:lnTo>
+                    <a:pt x="2578410" y="3110506"/>
+                  </a:lnTo>
+                  <a:lnTo>
+                    <a:pt x="2506788" y="3141056"/>
+                  </a:lnTo>
+                  <a:lnTo>
+                    <a:pt x="2435165" y="3169885"/>
+                  </a:lnTo>
+                  <a:lnTo>
+                    <a:pt x="2363543" y="3197088"/>
+                  </a:lnTo>
+                  <a:lnTo>
+                    <a:pt x="2291920" y="3222759"/>
+                  </a:lnTo>
+                  <a:lnTo>
+                    <a:pt x="2220298" y="3246984"/>
+                  </a:lnTo>
+                  <a:lnTo>
+                    <a:pt x="2148675" y="3269843"/>
+                  </a:lnTo>
+                  <a:lnTo>
+                    <a:pt x="2077053" y="3291414"/>
+                  </a:lnTo>
+                  <a:lnTo>
+                    <a:pt x="2005430" y="3311769"/>
+                  </a:lnTo>
+                  <a:lnTo>
+                    <a:pt x="1933808" y="3330978"/>
+                  </a:lnTo>
+                  <a:lnTo>
+                    <a:pt x="1862185" y="3349104"/>
+                  </a:lnTo>
+                  <a:lnTo>
+                    <a:pt x="1790563" y="3366209"/>
+                  </a:lnTo>
+                  <a:lnTo>
+                    <a:pt x="1718940" y="3382349"/>
+                  </a:lnTo>
+                  <a:lnTo>
+                    <a:pt x="1647318" y="3397581"/>
+                  </a:lnTo>
+                  <a:lnTo>
+                    <a:pt x="1575695" y="3411954"/>
+                  </a:lnTo>
+                  <a:lnTo>
+                    <a:pt x="1504073" y="3425517"/>
+                  </a:lnTo>
+                  <a:lnTo>
+                    <a:pt x="1432450" y="3438316"/>
+                  </a:lnTo>
+                  <a:lnTo>
+                    <a:pt x="1360827" y="3450393"/>
+                  </a:lnTo>
+                  <a:lnTo>
+                    <a:pt x="1289205" y="3461790"/>
+                  </a:lnTo>
+                  <a:lnTo>
+                    <a:pt x="1217582" y="3472545"/>
+                  </a:lnTo>
+                  <a:lnTo>
+                    <a:pt x="1145960" y="3482693"/>
+                  </a:lnTo>
+                  <a:lnTo>
+                    <a:pt x="1074337" y="3492270"/>
+                  </a:lnTo>
+                  <a:lnTo>
+                    <a:pt x="1002715" y="3501307"/>
+                  </a:lnTo>
+                  <a:lnTo>
+                    <a:pt x="931092" y="3509835"/>
+                  </a:lnTo>
+                  <a:lnTo>
+                    <a:pt x="859470" y="3517883"/>
+                  </a:lnTo>
+                  <a:lnTo>
+                    <a:pt x="787847" y="3525476"/>
+                  </a:lnTo>
+                  <a:lnTo>
+                    <a:pt x="716225" y="3532642"/>
+                  </a:lnTo>
+                  <a:lnTo>
+                    <a:pt x="644602" y="3539405"/>
+                  </a:lnTo>
+                  <a:lnTo>
+                    <a:pt x="572980" y="3545786"/>
+                  </a:lnTo>
+                  <a:lnTo>
+                    <a:pt x="501357" y="3551807"/>
+                  </a:lnTo>
+                  <a:lnTo>
+                    <a:pt x="429735" y="3557489"/>
+                  </a:lnTo>
+                  <a:lnTo>
+                    <a:pt x="358112" y="3562851"/>
+                  </a:lnTo>
+                  <a:lnTo>
+                    <a:pt x="286490" y="3567911"/>
+                  </a:lnTo>
+                  <a:lnTo>
+                    <a:pt x="214867" y="3572686"/>
+                  </a:lnTo>
+                  <a:lnTo>
+                    <a:pt x="143245" y="3577192"/>
+                  </a:lnTo>
+                  <a:lnTo>
+                    <a:pt x="71622" y="3581443"/>
+                  </a:lnTo>
+                  <a:lnTo>
+                    <a:pt x="0" y="3585456"/>
                   </a:lnTo>
                   <a:close/>
                 </a:path>
@@ -3507,224 +3504,221 @@
           <p:spPr>
             <a:xfrm>
               <a:off x="1172049" y="1896563"/>
-              <a:ext cx="4975946" cy="2769344"/>
+              <a:ext cx="4933925" cy="2780150"/>
             </a:xfrm>
             <a:custGeom>
               <a:avLst/>
               <a:pathLst>
-                <a:path w="4975946" h="2769344">
+                <a:path w="4933925" h="2780150">
                   <a:moveTo>
-                    <a:pt x="0" y="1348992"/>
+                    <a:pt x="0" y="1374884"/>
                   </a:moveTo>
                   <a:lnTo>
-                    <a:pt x="71622" y="1398637"/>
-                  </a:lnTo>
-                  <a:lnTo>
-                    <a:pt x="143245" y="1447212"/>
-                  </a:lnTo>
-                  <a:lnTo>
-                    <a:pt x="214867" y="1494740"/>
-                  </a:lnTo>
-                  <a:lnTo>
-                    <a:pt x="286490" y="1541244"/>
-                  </a:lnTo>
-                  <a:lnTo>
-                    <a:pt x="358112" y="1586745"/>
-                  </a:lnTo>
-                  <a:lnTo>
-                    <a:pt x="429735" y="1631266"/>
-                  </a:lnTo>
-                  <a:lnTo>
-                    <a:pt x="501357" y="1674828"/>
-                  </a:lnTo>
-                  <a:lnTo>
-                    <a:pt x="572980" y="1717451"/>
-                  </a:lnTo>
-                  <a:lnTo>
-                    <a:pt x="644602" y="1759155"/>
-                  </a:lnTo>
-                  <a:lnTo>
-                    <a:pt x="716225" y="1799960"/>
-                  </a:lnTo>
-                  <a:lnTo>
-                    <a:pt x="787847" y="1839887"/>
-                  </a:lnTo>
-                  <a:lnTo>
-                    <a:pt x="859470" y="1878952"/>
-                  </a:lnTo>
-                  <a:lnTo>
-                    <a:pt x="931092" y="1917176"/>
-                  </a:lnTo>
-                  <a:lnTo>
-                    <a:pt x="1002715" y="1954576"/>
-                  </a:lnTo>
-                  <a:lnTo>
-                    <a:pt x="1074337" y="1991170"/>
-                  </a:lnTo>
-                  <a:lnTo>
-                    <a:pt x="1145960" y="2026976"/>
-                  </a:lnTo>
-                  <a:lnTo>
-                    <a:pt x="1217582" y="2062010"/>
-                  </a:lnTo>
-                  <a:lnTo>
-                    <a:pt x="1289205" y="2096289"/>
-                  </a:lnTo>
-                  <a:lnTo>
-                    <a:pt x="1360827" y="2129829"/>
-                  </a:lnTo>
-                  <a:lnTo>
-                    <a:pt x="1432450" y="2162646"/>
-                  </a:lnTo>
-                  <a:lnTo>
-                    <a:pt x="1504073" y="2194756"/>
-                  </a:lnTo>
-                  <a:lnTo>
-                    <a:pt x="1575695" y="2226174"/>
-                  </a:lnTo>
-                  <a:lnTo>
-                    <a:pt x="1647318" y="2256915"/>
-                  </a:lnTo>
-                  <a:lnTo>
-                    <a:pt x="1718940" y="2286994"/>
-                  </a:lnTo>
-                  <a:lnTo>
-                    <a:pt x="1790563" y="2316424"/>
-                  </a:lnTo>
-                  <a:lnTo>
-                    <a:pt x="1862185" y="2345220"/>
-                  </a:lnTo>
-                  <a:lnTo>
-                    <a:pt x="1933808" y="2373396"/>
-                  </a:lnTo>
-                  <a:lnTo>
-                    <a:pt x="2005430" y="2400964"/>
-                  </a:lnTo>
-                  <a:lnTo>
-                    <a:pt x="2077053" y="2427939"/>
-                  </a:lnTo>
-                  <a:lnTo>
-                    <a:pt x="2148675" y="2454331"/>
-                  </a:lnTo>
-                  <a:lnTo>
-                    <a:pt x="2220298" y="2480156"/>
-                  </a:lnTo>
-                  <a:lnTo>
-                    <a:pt x="2291920" y="2505423"/>
-                  </a:lnTo>
-                  <a:lnTo>
-                    <a:pt x="2363543" y="2530146"/>
-                  </a:lnTo>
-                  <a:lnTo>
-                    <a:pt x="2435165" y="2554337"/>
-                  </a:lnTo>
-                  <a:lnTo>
-                    <a:pt x="2506788" y="2578006"/>
-                  </a:lnTo>
-                  <a:lnTo>
-                    <a:pt x="2578410" y="2601165"/>
-                  </a:lnTo>
-                  <a:lnTo>
-                    <a:pt x="2650033" y="2623824"/>
-                  </a:lnTo>
-                  <a:lnTo>
-                    <a:pt x="2721655" y="2645996"/>
-                  </a:lnTo>
-                  <a:lnTo>
-                    <a:pt x="2793278" y="2667690"/>
-                  </a:lnTo>
-                  <a:lnTo>
-                    <a:pt x="2864901" y="2688916"/>
-                  </a:lnTo>
-                  <a:lnTo>
-                    <a:pt x="2936523" y="2709685"/>
-                  </a:lnTo>
-                  <a:lnTo>
-                    <a:pt x="3008146" y="2730006"/>
-                  </a:lnTo>
-                  <a:lnTo>
-                    <a:pt x="3079768" y="2749889"/>
-                  </a:lnTo>
-                  <a:lnTo>
-                    <a:pt x="3151391" y="2769344"/>
-                  </a:lnTo>
-                  <a:lnTo>
-                    <a:pt x="3223013" y="2768404"/>
-                  </a:lnTo>
-                  <a:lnTo>
-                    <a:pt x="3294636" y="2715658"/>
-                  </a:lnTo>
-                  <a:lnTo>
-                    <a:pt x="3366258" y="2659766"/>
-                  </a:lnTo>
-                  <a:lnTo>
-                    <a:pt x="3437881" y="2600539"/>
-                  </a:lnTo>
-                  <a:lnTo>
-                    <a:pt x="3509503" y="2537779"/>
-                  </a:lnTo>
-                  <a:lnTo>
-                    <a:pt x="3581126" y="2471276"/>
-                  </a:lnTo>
-                  <a:lnTo>
-                    <a:pt x="3652748" y="2400806"/>
-                  </a:lnTo>
-                  <a:lnTo>
-                    <a:pt x="3724371" y="2326132"/>
-                  </a:lnTo>
-                  <a:lnTo>
-                    <a:pt x="3795993" y="2247004"/>
-                  </a:lnTo>
-                  <a:lnTo>
-                    <a:pt x="3867616" y="2163155"/>
-                  </a:lnTo>
-                  <a:lnTo>
-                    <a:pt x="3939238" y="2074305"/>
-                  </a:lnTo>
-                  <a:lnTo>
-                    <a:pt x="4010861" y="1980155"/>
-                  </a:lnTo>
-                  <a:lnTo>
-                    <a:pt x="4082483" y="1880388"/>
-                  </a:lnTo>
-                  <a:lnTo>
-                    <a:pt x="4154106" y="1774670"/>
-                  </a:lnTo>
-                  <a:lnTo>
-                    <a:pt x="4225729" y="1662646"/>
-                  </a:lnTo>
-                  <a:lnTo>
-                    <a:pt x="4297351" y="1543940"/>
-                  </a:lnTo>
-                  <a:lnTo>
-                    <a:pt x="4368974" y="1418153"/>
-                  </a:lnTo>
-                  <a:lnTo>
-                    <a:pt x="4440596" y="1284862"/>
-                  </a:lnTo>
-                  <a:lnTo>
-                    <a:pt x="4512219" y="1143620"/>
-                  </a:lnTo>
-                  <a:lnTo>
-                    <a:pt x="4583841" y="993954"/>
-                  </a:lnTo>
-                  <a:lnTo>
-                    <a:pt x="4655464" y="835359"/>
-                  </a:lnTo>
-                  <a:lnTo>
-                    <a:pt x="4727086" y="667303"/>
-                  </a:lnTo>
-                  <a:lnTo>
-                    <a:pt x="4798709" y="489223"/>
-                  </a:lnTo>
-                  <a:lnTo>
-                    <a:pt x="4870331" y="300521"/>
-                  </a:lnTo>
-                  <a:lnTo>
-                    <a:pt x="4941954" y="100562"/>
-                  </a:lnTo>
-                  <a:lnTo>
-                    <a:pt x="4975946" y="0"/>
+                    <a:pt x="71622" y="1424021"/>
+                  </a:lnTo>
+                  <a:lnTo>
+                    <a:pt x="143245" y="1472099"/>
+                  </a:lnTo>
+                  <a:lnTo>
+                    <a:pt x="214867" y="1519140"/>
+                  </a:lnTo>
+                  <a:lnTo>
+                    <a:pt x="286490" y="1565165"/>
+                  </a:lnTo>
+                  <a:lnTo>
+                    <a:pt x="358112" y="1610198"/>
+                  </a:lnTo>
+                  <a:lnTo>
+                    <a:pt x="429735" y="1654259"/>
+                  </a:lnTo>
+                  <a:lnTo>
+                    <a:pt x="501357" y="1697370"/>
+                  </a:lnTo>
+                  <a:lnTo>
+                    <a:pt x="572980" y="1739551"/>
+                  </a:lnTo>
+                  <a:lnTo>
+                    <a:pt x="644602" y="1780822"/>
+                  </a:lnTo>
+                  <a:lnTo>
+                    <a:pt x="716225" y="1821202"/>
+                  </a:lnTo>
+                  <a:lnTo>
+                    <a:pt x="787847" y="1860712"/>
+                  </a:lnTo>
+                  <a:lnTo>
+                    <a:pt x="859470" y="1899369"/>
+                  </a:lnTo>
+                  <a:lnTo>
+                    <a:pt x="931092" y="1937192"/>
+                  </a:lnTo>
+                  <a:lnTo>
+                    <a:pt x="1002715" y="1974199"/>
+                  </a:lnTo>
+                  <a:lnTo>
+                    <a:pt x="1074337" y="2010408"/>
+                  </a:lnTo>
+                  <a:lnTo>
+                    <a:pt x="1145960" y="2045836"/>
+                  </a:lnTo>
+                  <a:lnTo>
+                    <a:pt x="1217582" y="2080499"/>
+                  </a:lnTo>
+                  <a:lnTo>
+                    <a:pt x="1289205" y="2114415"/>
+                  </a:lnTo>
+                  <a:lnTo>
+                    <a:pt x="1360827" y="2147598"/>
+                  </a:lnTo>
+                  <a:lnTo>
+                    <a:pt x="1432450" y="2180067"/>
+                  </a:lnTo>
+                  <a:lnTo>
+                    <a:pt x="1504073" y="2211834"/>
+                  </a:lnTo>
+                  <a:lnTo>
+                    <a:pt x="1575695" y="2242917"/>
+                  </a:lnTo>
+                  <a:lnTo>
+                    <a:pt x="1647318" y="2273328"/>
+                  </a:lnTo>
+                  <a:lnTo>
+                    <a:pt x="1718940" y="2303084"/>
+                  </a:lnTo>
+                  <a:lnTo>
+                    <a:pt x="1790563" y="2332198"/>
+                  </a:lnTo>
+                  <a:lnTo>
+                    <a:pt x="1862185" y="2360684"/>
+                  </a:lnTo>
+                  <a:lnTo>
+                    <a:pt x="1933808" y="2388555"/>
+                  </a:lnTo>
+                  <a:lnTo>
+                    <a:pt x="2005430" y="2415825"/>
+                  </a:lnTo>
+                  <a:lnTo>
+                    <a:pt x="2077053" y="2442507"/>
+                  </a:lnTo>
+                  <a:lnTo>
+                    <a:pt x="2148675" y="2468613"/>
+                  </a:lnTo>
+                  <a:lnTo>
+                    <a:pt x="2220298" y="2494156"/>
+                  </a:lnTo>
+                  <a:lnTo>
+                    <a:pt x="2291920" y="2519147"/>
+                  </a:lnTo>
+                  <a:lnTo>
+                    <a:pt x="2363543" y="2543600"/>
+                  </a:lnTo>
+                  <a:lnTo>
+                    <a:pt x="2435165" y="2567525"/>
+                  </a:lnTo>
+                  <a:lnTo>
+                    <a:pt x="2506788" y="2590934"/>
+                  </a:lnTo>
+                  <a:lnTo>
+                    <a:pt x="2578410" y="2613838"/>
+                  </a:lnTo>
+                  <a:lnTo>
+                    <a:pt x="2650033" y="2636248"/>
+                  </a:lnTo>
+                  <a:lnTo>
+                    <a:pt x="2721655" y="2658175"/>
+                  </a:lnTo>
+                  <a:lnTo>
+                    <a:pt x="2793278" y="2679628"/>
+                  </a:lnTo>
+                  <a:lnTo>
+                    <a:pt x="2864901" y="2700619"/>
+                  </a:lnTo>
+                  <a:lnTo>
+                    <a:pt x="2936523" y="2721157"/>
+                  </a:lnTo>
+                  <a:lnTo>
+                    <a:pt x="3008146" y="2741252"/>
+                  </a:lnTo>
+                  <a:lnTo>
+                    <a:pt x="3079768" y="2760913"/>
+                  </a:lnTo>
+                  <a:lnTo>
+                    <a:pt x="3151391" y="2780150"/>
+                  </a:lnTo>
+                  <a:lnTo>
+                    <a:pt x="3223013" y="2738922"/>
+                  </a:lnTo>
+                  <a:lnTo>
+                    <a:pt x="3294636" y="2684359"/>
+                  </a:lnTo>
+                  <a:lnTo>
+                    <a:pt x="3366258" y="2626537"/>
+                  </a:lnTo>
+                  <a:lnTo>
+                    <a:pt x="3437881" y="2565262"/>
+                  </a:lnTo>
+                  <a:lnTo>
+                    <a:pt x="3509503" y="2500328"/>
+                  </a:lnTo>
+                  <a:lnTo>
+                    <a:pt x="3581126" y="2431517"/>
+                  </a:lnTo>
+                  <a:lnTo>
+                    <a:pt x="3652748" y="2358596"/>
+                  </a:lnTo>
+                  <a:lnTo>
+                    <a:pt x="3724371" y="2281321"/>
+                  </a:lnTo>
+                  <a:lnTo>
+                    <a:pt x="3795993" y="2199432"/>
+                  </a:lnTo>
+                  <a:lnTo>
+                    <a:pt x="3867616" y="2112652"/>
+                  </a:lnTo>
+                  <a:lnTo>
+                    <a:pt x="3939238" y="2020690"/>
+                  </a:lnTo>
+                  <a:lnTo>
+                    <a:pt x="4010861" y="1923237"/>
+                  </a:lnTo>
+                  <a:lnTo>
+                    <a:pt x="4082483" y="1819964"/>
+                  </a:lnTo>
+                  <a:lnTo>
+                    <a:pt x="4154106" y="1710524"/>
+                  </a:lnTo>
+                  <a:lnTo>
+                    <a:pt x="4225729" y="1594549"/>
+                  </a:lnTo>
+                  <a:lnTo>
+                    <a:pt x="4297351" y="1471648"/>
+                  </a:lnTo>
+                  <a:lnTo>
+                    <a:pt x="4368974" y="1341408"/>
+                  </a:lnTo>
+                  <a:lnTo>
+                    <a:pt x="4440596" y="1203391"/>
+                  </a:lnTo>
+                  <a:lnTo>
+                    <a:pt x="4512219" y="1057132"/>
+                  </a:lnTo>
+                  <a:lnTo>
+                    <a:pt x="4583841" y="902139"/>
+                  </a:lnTo>
+                  <a:lnTo>
+                    <a:pt x="4655464" y="737890"/>
+                  </a:lnTo>
+                  <a:lnTo>
+                    <a:pt x="4727086" y="563833"/>
+                  </a:lnTo>
+                  <a:lnTo>
+                    <a:pt x="4798709" y="379383"/>
+                  </a:lnTo>
+                  <a:lnTo>
+                    <a:pt x="4870331" y="183917"/>
+                  </a:lnTo>
+                  <a:lnTo>
+                    <a:pt x="4933925" y="0"/>
                   </a:lnTo>
                 </a:path>
               </a:pathLst>
@@ -3744,312 +3738,312 @@
           </p:nvSpPr>
           <p:spPr>
             <a:xfrm>
-              <a:off x="1172049" y="4684943"/>
-              <a:ext cx="7090630" cy="799066"/>
+              <a:off x="1172049" y="4686975"/>
+              <a:ext cx="7090630" cy="795044"/>
             </a:xfrm>
             <a:custGeom>
               <a:avLst/>
               <a:pathLst>
-                <a:path w="7090630" h="799066">
+                <a:path w="7090630" h="795044">
                   <a:moveTo>
-                    <a:pt x="7090630" y="597748"/>
+                    <a:pt x="7090630" y="599308"/>
                   </a:moveTo>
                   <a:lnTo>
-                    <a:pt x="7019007" y="591878"/>
-                  </a:lnTo>
-                  <a:lnTo>
-                    <a:pt x="6947385" y="585879"/>
-                  </a:lnTo>
-                  <a:lnTo>
-                    <a:pt x="6875762" y="579747"/>
-                  </a:lnTo>
-                  <a:lnTo>
-                    <a:pt x="6804139" y="573481"/>
-                  </a:lnTo>
-                  <a:lnTo>
-                    <a:pt x="6732517" y="567076"/>
-                  </a:lnTo>
-                  <a:lnTo>
-                    <a:pt x="6660894" y="560531"/>
-                  </a:lnTo>
-                  <a:lnTo>
-                    <a:pt x="6589272" y="553841"/>
-                  </a:lnTo>
-                  <a:lnTo>
-                    <a:pt x="6517649" y="547004"/>
-                  </a:lnTo>
-                  <a:lnTo>
-                    <a:pt x="6446027" y="540016"/>
-                  </a:lnTo>
-                  <a:lnTo>
-                    <a:pt x="6374404" y="532875"/>
-                  </a:lnTo>
-                  <a:lnTo>
-                    <a:pt x="6302782" y="525576"/>
-                  </a:lnTo>
-                  <a:lnTo>
-                    <a:pt x="6231159" y="518116"/>
-                  </a:lnTo>
-                  <a:lnTo>
-                    <a:pt x="6159537" y="510492"/>
-                  </a:lnTo>
-                  <a:lnTo>
-                    <a:pt x="6087914" y="502701"/>
-                  </a:lnTo>
-                  <a:lnTo>
-                    <a:pt x="6016292" y="494737"/>
-                  </a:lnTo>
-                  <a:lnTo>
-                    <a:pt x="5944669" y="486598"/>
-                  </a:lnTo>
-                  <a:lnTo>
-                    <a:pt x="5873047" y="478280"/>
-                  </a:lnTo>
-                  <a:lnTo>
-                    <a:pt x="5801424" y="469779"/>
-                  </a:lnTo>
-                  <a:lnTo>
-                    <a:pt x="5729802" y="461090"/>
-                  </a:lnTo>
-                  <a:lnTo>
-                    <a:pt x="5658179" y="452210"/>
-                  </a:lnTo>
-                  <a:lnTo>
-                    <a:pt x="5586557" y="443135"/>
-                  </a:lnTo>
-                  <a:lnTo>
-                    <a:pt x="5514934" y="433859"/>
-                  </a:lnTo>
-                  <a:lnTo>
-                    <a:pt x="5443311" y="424380"/>
-                  </a:lnTo>
-                  <a:lnTo>
-                    <a:pt x="5371689" y="414691"/>
-                  </a:lnTo>
-                  <a:lnTo>
-                    <a:pt x="5300066" y="404789"/>
-                  </a:lnTo>
-                  <a:lnTo>
-                    <a:pt x="5228444" y="394669"/>
-                  </a:lnTo>
-                  <a:lnTo>
-                    <a:pt x="5156821" y="384326"/>
-                  </a:lnTo>
-                  <a:lnTo>
-                    <a:pt x="5085199" y="373756"/>
-                  </a:lnTo>
-                  <a:lnTo>
-                    <a:pt x="5013576" y="362952"/>
-                  </a:lnTo>
-                  <a:lnTo>
-                    <a:pt x="4941954" y="351911"/>
-                  </a:lnTo>
-                  <a:lnTo>
-                    <a:pt x="4870331" y="340626"/>
-                  </a:lnTo>
-                  <a:lnTo>
-                    <a:pt x="4798709" y="329093"/>
-                  </a:lnTo>
-                  <a:lnTo>
-                    <a:pt x="4727086" y="317306"/>
-                  </a:lnTo>
-                  <a:lnTo>
-                    <a:pt x="4655464" y="305259"/>
-                  </a:lnTo>
-                  <a:lnTo>
-                    <a:pt x="4583841" y="292947"/>
-                  </a:lnTo>
-                  <a:lnTo>
-                    <a:pt x="4512219" y="280364"/>
-                  </a:lnTo>
-                  <a:lnTo>
-                    <a:pt x="4440596" y="267503"/>
-                  </a:lnTo>
-                  <a:lnTo>
-                    <a:pt x="4368974" y="254360"/>
-                  </a:lnTo>
-                  <a:lnTo>
-                    <a:pt x="4297351" y="240926"/>
-                  </a:lnTo>
-                  <a:lnTo>
-                    <a:pt x="4225729" y="227197"/>
-                  </a:lnTo>
-                  <a:lnTo>
-                    <a:pt x="4154106" y="213166"/>
-                  </a:lnTo>
-                  <a:lnTo>
-                    <a:pt x="4082483" y="198825"/>
-                  </a:lnTo>
-                  <a:lnTo>
-                    <a:pt x="4010861" y="184169"/>
-                  </a:lnTo>
-                  <a:lnTo>
-                    <a:pt x="3939238" y="169190"/>
-                  </a:lnTo>
-                  <a:lnTo>
-                    <a:pt x="3867616" y="153881"/>
-                  </a:lnTo>
-                  <a:lnTo>
-                    <a:pt x="3795993" y="138235"/>
-                  </a:lnTo>
-                  <a:lnTo>
-                    <a:pt x="3724371" y="122244"/>
-                  </a:lnTo>
-                  <a:lnTo>
-                    <a:pt x="3652748" y="105901"/>
-                  </a:lnTo>
-                  <a:lnTo>
-                    <a:pt x="3581126" y="89198"/>
-                  </a:lnTo>
-                  <a:lnTo>
-                    <a:pt x="3509503" y="72127"/>
-                  </a:lnTo>
-                  <a:lnTo>
-                    <a:pt x="3437881" y="54680"/>
-                  </a:lnTo>
-                  <a:lnTo>
-                    <a:pt x="3366258" y="36849"/>
-                  </a:lnTo>
-                  <a:lnTo>
-                    <a:pt x="3294636" y="18625"/>
-                  </a:lnTo>
-                  <a:lnTo>
-                    <a:pt x="3223013" y="0"/>
-                  </a:lnTo>
-                  <a:lnTo>
-                    <a:pt x="3151391" y="29802"/>
-                  </a:lnTo>
-                  <a:lnTo>
-                    <a:pt x="3079768" y="76776"/>
-                  </a:lnTo>
-                  <a:lnTo>
-                    <a:pt x="3008146" y="121107"/>
-                  </a:lnTo>
-                  <a:lnTo>
-                    <a:pt x="2936523" y="162942"/>
-                  </a:lnTo>
-                  <a:lnTo>
-                    <a:pt x="2864901" y="202421"/>
-                  </a:lnTo>
-                  <a:lnTo>
-                    <a:pt x="2793278" y="239679"/>
-                  </a:lnTo>
-                  <a:lnTo>
-                    <a:pt x="2721655" y="274839"/>
-                  </a:lnTo>
-                  <a:lnTo>
-                    <a:pt x="2650033" y="308020"/>
-                  </a:lnTo>
-                  <a:lnTo>
-                    <a:pt x="2578410" y="339333"/>
-                  </a:lnTo>
-                  <a:lnTo>
-                    <a:pt x="2506788" y="368883"/>
-                  </a:lnTo>
-                  <a:lnTo>
-                    <a:pt x="2435165" y="396770"/>
-                  </a:lnTo>
-                  <a:lnTo>
-                    <a:pt x="2363543" y="423086"/>
-                  </a:lnTo>
-                  <a:lnTo>
-                    <a:pt x="2291920" y="447922"/>
-                  </a:lnTo>
-                  <a:lnTo>
-                    <a:pt x="2220298" y="471359"/>
-                  </a:lnTo>
-                  <a:lnTo>
-                    <a:pt x="2148675" y="493477"/>
-                  </a:lnTo>
-                  <a:lnTo>
-                    <a:pt x="2077053" y="514350"/>
-                  </a:lnTo>
-                  <a:lnTo>
-                    <a:pt x="2005430" y="534048"/>
-                  </a:lnTo>
-                  <a:lnTo>
-                    <a:pt x="1933808" y="552637"/>
-                  </a:lnTo>
-                  <a:lnTo>
-                    <a:pt x="1862185" y="570179"/>
-                  </a:lnTo>
-                  <a:lnTo>
-                    <a:pt x="1790563" y="586734"/>
-                  </a:lnTo>
-                  <a:lnTo>
-                    <a:pt x="1718940" y="602358"/>
-                  </a:lnTo>
-                  <a:lnTo>
-                    <a:pt x="1647318" y="617101"/>
-                  </a:lnTo>
-                  <a:lnTo>
-                    <a:pt x="1575695" y="631015"/>
-                  </a:lnTo>
-                  <a:lnTo>
-                    <a:pt x="1504073" y="644145"/>
-                  </a:lnTo>
-                  <a:lnTo>
-                    <a:pt x="1432450" y="656536"/>
-                  </a:lnTo>
-                  <a:lnTo>
-                    <a:pt x="1360827" y="668230"/>
-                  </a:lnTo>
-                  <a:lnTo>
-                    <a:pt x="1289205" y="679265"/>
-                  </a:lnTo>
-                  <a:lnTo>
-                    <a:pt x="1217582" y="689680"/>
-                  </a:lnTo>
-                  <a:lnTo>
-                    <a:pt x="1145960" y="699508"/>
-                  </a:lnTo>
-                  <a:lnTo>
-                    <a:pt x="1074337" y="708782"/>
-                  </a:lnTo>
-                  <a:lnTo>
-                    <a:pt x="1002715" y="717535"/>
-                  </a:lnTo>
-                  <a:lnTo>
-                    <a:pt x="931092" y="725795"/>
-                  </a:lnTo>
-                  <a:lnTo>
-                    <a:pt x="859470" y="733590"/>
-                  </a:lnTo>
-                  <a:lnTo>
-                    <a:pt x="787847" y="740946"/>
-                  </a:lnTo>
-                  <a:lnTo>
-                    <a:pt x="716225" y="747888"/>
-                  </a:lnTo>
-                  <a:lnTo>
-                    <a:pt x="644602" y="754439"/>
-                  </a:lnTo>
-                  <a:lnTo>
-                    <a:pt x="572980" y="760621"/>
-                  </a:lnTo>
-                  <a:lnTo>
-                    <a:pt x="501357" y="766456"/>
-                  </a:lnTo>
-                  <a:lnTo>
-                    <a:pt x="429735" y="771962"/>
-                  </a:lnTo>
-                  <a:lnTo>
-                    <a:pt x="358112" y="777158"/>
-                  </a:lnTo>
-                  <a:lnTo>
-                    <a:pt x="286490" y="782061"/>
-                  </a:lnTo>
-                  <a:lnTo>
-                    <a:pt x="214867" y="786689"/>
-                  </a:lnTo>
-                  <a:lnTo>
-                    <a:pt x="143245" y="791056"/>
-                  </a:lnTo>
-                  <a:lnTo>
-                    <a:pt x="71622" y="795177"/>
-                  </a:lnTo>
-                  <a:lnTo>
-                    <a:pt x="0" y="799066"/>
+                    <a:pt x="7019007" y="593511"/>
+                  </a:lnTo>
+                  <a:lnTo>
+                    <a:pt x="6947385" y="587586"/>
+                  </a:lnTo>
+                  <a:lnTo>
+                    <a:pt x="6875762" y="581531"/>
+                  </a:lnTo>
+                  <a:lnTo>
+                    <a:pt x="6804139" y="575342"/>
+                  </a:lnTo>
+                  <a:lnTo>
+                    <a:pt x="6732517" y="569016"/>
+                  </a:lnTo>
+                  <a:lnTo>
+                    <a:pt x="6660894" y="562551"/>
+                  </a:lnTo>
+                  <a:lnTo>
+                    <a:pt x="6589272" y="555944"/>
+                  </a:lnTo>
+                  <a:lnTo>
+                    <a:pt x="6517649" y="549190"/>
+                  </a:lnTo>
+                  <a:lnTo>
+                    <a:pt x="6446027" y="542288"/>
+                  </a:lnTo>
+                  <a:lnTo>
+                    <a:pt x="6374404" y="535234"/>
+                  </a:lnTo>
+                  <a:lnTo>
+                    <a:pt x="6302782" y="528024"/>
+                  </a:lnTo>
+                  <a:lnTo>
+                    <a:pt x="6231159" y="520656"/>
+                  </a:lnTo>
+                  <a:lnTo>
+                    <a:pt x="6159537" y="513124"/>
+                  </a:lnTo>
+                  <a:lnTo>
+                    <a:pt x="6087914" y="505427"/>
+                  </a:lnTo>
+                  <a:lnTo>
+                    <a:pt x="6016292" y="497560"/>
+                  </a:lnTo>
+                  <a:lnTo>
+                    <a:pt x="5944669" y="489520"/>
+                  </a:lnTo>
+                  <a:lnTo>
+                    <a:pt x="5873047" y="481302"/>
+                  </a:lnTo>
+                  <a:lnTo>
+                    <a:pt x="5801424" y="472903"/>
+                  </a:lnTo>
+                  <a:lnTo>
+                    <a:pt x="5729802" y="464319"/>
+                  </a:lnTo>
+                  <a:lnTo>
+                    <a:pt x="5658179" y="455545"/>
+                  </a:lnTo>
+                  <a:lnTo>
+                    <a:pt x="5586557" y="446579"/>
+                  </a:lnTo>
+                  <a:lnTo>
+                    <a:pt x="5514934" y="437414"/>
+                  </a:lnTo>
+                  <a:lnTo>
+                    <a:pt x="5443311" y="428048"/>
+                  </a:lnTo>
+                  <a:lnTo>
+                    <a:pt x="5371689" y="418474"/>
+                  </a:lnTo>
+                  <a:lnTo>
+                    <a:pt x="5300066" y="408690"/>
+                  </a:lnTo>
+                  <a:lnTo>
+                    <a:pt x="5228444" y="398690"/>
+                  </a:lnTo>
+                  <a:lnTo>
+                    <a:pt x="5156821" y="388470"/>
+                  </a:lnTo>
+                  <a:lnTo>
+                    <a:pt x="5085199" y="378024"/>
+                  </a:lnTo>
+                  <a:lnTo>
+                    <a:pt x="5013576" y="367348"/>
+                  </a:lnTo>
+                  <a:lnTo>
+                    <a:pt x="4941954" y="356437"/>
+                  </a:lnTo>
+                  <a:lnTo>
+                    <a:pt x="4870331" y="345285"/>
+                  </a:lnTo>
+                  <a:lnTo>
+                    <a:pt x="4798709" y="333887"/>
+                  </a:lnTo>
+                  <a:lnTo>
+                    <a:pt x="4727086" y="322238"/>
+                  </a:lnTo>
+                  <a:lnTo>
+                    <a:pt x="4655464" y="310332"/>
+                  </a:lnTo>
+                  <a:lnTo>
+                    <a:pt x="4583841" y="298163"/>
+                  </a:lnTo>
+                  <a:lnTo>
+                    <a:pt x="4512219" y="285726"/>
+                  </a:lnTo>
+                  <a:lnTo>
+                    <a:pt x="4440596" y="273015"/>
+                  </a:lnTo>
+                  <a:lnTo>
+                    <a:pt x="4368974" y="260024"/>
+                  </a:lnTo>
+                  <a:lnTo>
+                    <a:pt x="4297351" y="246746"/>
+                  </a:lnTo>
+                  <a:lnTo>
+                    <a:pt x="4225729" y="233175"/>
+                  </a:lnTo>
+                  <a:lnTo>
+                    <a:pt x="4154106" y="219306"/>
+                  </a:lnTo>
+                  <a:lnTo>
+                    <a:pt x="4082483" y="205130"/>
+                  </a:lnTo>
+                  <a:lnTo>
+                    <a:pt x="4010861" y="190642"/>
+                  </a:lnTo>
+                  <a:lnTo>
+                    <a:pt x="3939238" y="175835"/>
+                  </a:lnTo>
+                  <a:lnTo>
+                    <a:pt x="3867616" y="160701"/>
+                  </a:lnTo>
+                  <a:lnTo>
+                    <a:pt x="3795993" y="145233"/>
+                  </a:lnTo>
+                  <a:lnTo>
+                    <a:pt x="3724371" y="129424"/>
+                  </a:lnTo>
+                  <a:lnTo>
+                    <a:pt x="3652748" y="113267"/>
+                  </a:lnTo>
+                  <a:lnTo>
+                    <a:pt x="3581126" y="96753"/>
+                  </a:lnTo>
+                  <a:lnTo>
+                    <a:pt x="3509503" y="79876"/>
+                  </a:lnTo>
+                  <a:lnTo>
+                    <a:pt x="3437881" y="62626"/>
+                  </a:lnTo>
+                  <a:lnTo>
+                    <a:pt x="3366258" y="44996"/>
+                  </a:lnTo>
+                  <a:lnTo>
+                    <a:pt x="3294636" y="26977"/>
+                  </a:lnTo>
+                  <a:lnTo>
+                    <a:pt x="3223013" y="8561"/>
+                  </a:lnTo>
+                  <a:lnTo>
+                    <a:pt x="3151391" y="0"/>
+                  </a:lnTo>
+                  <a:lnTo>
+                    <a:pt x="3079768" y="48587"/>
+                  </a:lnTo>
+                  <a:lnTo>
+                    <a:pt x="3008146" y="94436"/>
+                  </a:lnTo>
+                  <a:lnTo>
+                    <a:pt x="2936523" y="137702"/>
+                  </a:lnTo>
+                  <a:lnTo>
+                    <a:pt x="2864901" y="178530"/>
+                  </a:lnTo>
+                  <a:lnTo>
+                    <a:pt x="2793278" y="217057"/>
+                  </a:lnTo>
+                  <a:lnTo>
+                    <a:pt x="2721655" y="253413"/>
+                  </a:lnTo>
+                  <a:lnTo>
+                    <a:pt x="2650033" y="287721"/>
+                  </a:lnTo>
+                  <a:lnTo>
+                    <a:pt x="2578410" y="320095"/>
+                  </a:lnTo>
+                  <a:lnTo>
+                    <a:pt x="2506788" y="350645"/>
+                  </a:lnTo>
+                  <a:lnTo>
+                    <a:pt x="2435165" y="379473"/>
+                  </a:lnTo>
+                  <a:lnTo>
+                    <a:pt x="2363543" y="406677"/>
+                  </a:lnTo>
+                  <a:lnTo>
+                    <a:pt x="2291920" y="432348"/>
+                  </a:lnTo>
+                  <a:lnTo>
+                    <a:pt x="2220298" y="456572"/>
+                  </a:lnTo>
+                  <a:lnTo>
+                    <a:pt x="2148675" y="479431"/>
+                  </a:lnTo>
+                  <a:lnTo>
+                    <a:pt x="2077053" y="501002"/>
+                  </a:lnTo>
+                  <a:lnTo>
+                    <a:pt x="2005430" y="521358"/>
+                  </a:lnTo>
+                  <a:lnTo>
+                    <a:pt x="1933808" y="540566"/>
+                  </a:lnTo>
+                  <a:lnTo>
+                    <a:pt x="1862185" y="558692"/>
+                  </a:lnTo>
+                  <a:lnTo>
+                    <a:pt x="1790563" y="575797"/>
+                  </a:lnTo>
+                  <a:lnTo>
+                    <a:pt x="1718940" y="591938"/>
+                  </a:lnTo>
+                  <a:lnTo>
+                    <a:pt x="1647318" y="607169"/>
+                  </a:lnTo>
+                  <a:lnTo>
+                    <a:pt x="1575695" y="621542"/>
+                  </a:lnTo>
+                  <a:lnTo>
+                    <a:pt x="1504073" y="635105"/>
+                  </a:lnTo>
+                  <a:lnTo>
+                    <a:pt x="1432450" y="647904"/>
+                  </a:lnTo>
+                  <a:lnTo>
+                    <a:pt x="1360827" y="659981"/>
+                  </a:lnTo>
+                  <a:lnTo>
+                    <a:pt x="1289205" y="671378"/>
+                  </a:lnTo>
+                  <a:lnTo>
+                    <a:pt x="1217582" y="682133"/>
+                  </a:lnTo>
+                  <a:lnTo>
+                    <a:pt x="1145960" y="692282"/>
+                  </a:lnTo>
+                  <a:lnTo>
+                    <a:pt x="1074337" y="701859"/>
+                  </a:lnTo>
+                  <a:lnTo>
+                    <a:pt x="1002715" y="710896"/>
+                  </a:lnTo>
+                  <a:lnTo>
+                    <a:pt x="931092" y="719424"/>
+                  </a:lnTo>
+                  <a:lnTo>
+                    <a:pt x="859470" y="727471"/>
+                  </a:lnTo>
+                  <a:lnTo>
+                    <a:pt x="787847" y="735065"/>
+                  </a:lnTo>
+                  <a:lnTo>
+                    <a:pt x="716225" y="742231"/>
+                  </a:lnTo>
+                  <a:lnTo>
+                    <a:pt x="644602" y="748993"/>
+                  </a:lnTo>
+                  <a:lnTo>
+                    <a:pt x="572980" y="755374"/>
+                  </a:lnTo>
+                  <a:lnTo>
+                    <a:pt x="501357" y="761396"/>
+                  </a:lnTo>
+                  <a:lnTo>
+                    <a:pt x="429735" y="767078"/>
+                  </a:lnTo>
+                  <a:lnTo>
+                    <a:pt x="358112" y="772440"/>
+                  </a:lnTo>
+                  <a:lnTo>
+                    <a:pt x="286490" y="777500"/>
+                  </a:lnTo>
+                  <a:lnTo>
+                    <a:pt x="214867" y="782274"/>
+                  </a:lnTo>
+                  <a:lnTo>
+                    <a:pt x="143245" y="786780"/>
+                  </a:lnTo>
+                  <a:lnTo>
+                    <a:pt x="71622" y="791032"/>
+                  </a:lnTo>
+                  <a:lnTo>
+                    <a:pt x="0" y="795044"/>
                   </a:lnTo>
                 </a:path>
               </a:pathLst>
@@ -4069,309 +4063,309 @@
           </p:nvSpPr>
           <p:spPr>
             <a:xfrm>
-              <a:off x="1172049" y="3228884"/>
-              <a:ext cx="7090630" cy="1932775"/>
+              <a:off x="1172049" y="3202626"/>
+              <a:ext cx="7090630" cy="1955380"/>
             </a:xfrm>
             <a:custGeom>
               <a:avLst/>
               <a:pathLst>
-                <a:path w="7090630" h="1932775">
+                <a:path w="7090630" h="1955380">
                   <a:moveTo>
-                    <a:pt x="0" y="1932775"/>
+                    <a:pt x="0" y="1955380"/>
                   </a:moveTo>
                   <a:lnTo>
-                    <a:pt x="71622" y="1925706"/>
-                  </a:lnTo>
-                  <a:lnTo>
-                    <a:pt x="143245" y="1918507"/>
-                  </a:lnTo>
-                  <a:lnTo>
-                    <a:pt x="214867" y="1911178"/>
-                  </a:lnTo>
-                  <a:lnTo>
-                    <a:pt x="286490" y="1903714"/>
-                  </a:lnTo>
-                  <a:lnTo>
-                    <a:pt x="358112" y="1896115"/>
-                  </a:lnTo>
-                  <a:lnTo>
-                    <a:pt x="429735" y="1888377"/>
-                  </a:lnTo>
-                  <a:lnTo>
-                    <a:pt x="501357" y="1880497"/>
-                  </a:lnTo>
-                  <a:lnTo>
-                    <a:pt x="572980" y="1872474"/>
-                  </a:lnTo>
-                  <a:lnTo>
-                    <a:pt x="644602" y="1864305"/>
-                  </a:lnTo>
-                  <a:lnTo>
-                    <a:pt x="716225" y="1855987"/>
-                  </a:lnTo>
-                  <a:lnTo>
-                    <a:pt x="787847" y="1847516"/>
-                  </a:lnTo>
-                  <a:lnTo>
-                    <a:pt x="859470" y="1838892"/>
-                  </a:lnTo>
-                  <a:lnTo>
-                    <a:pt x="931092" y="1830110"/>
-                  </a:lnTo>
-                  <a:lnTo>
-                    <a:pt x="1002715" y="1821168"/>
-                  </a:lnTo>
-                  <a:lnTo>
-                    <a:pt x="1074337" y="1812062"/>
-                  </a:lnTo>
-                  <a:lnTo>
-                    <a:pt x="1145960" y="1802791"/>
-                  </a:lnTo>
-                  <a:lnTo>
-                    <a:pt x="1217582" y="1793351"/>
-                  </a:lnTo>
-                  <a:lnTo>
-                    <a:pt x="1289205" y="1783738"/>
-                  </a:lnTo>
-                  <a:lnTo>
-                    <a:pt x="1360827" y="1773950"/>
-                  </a:lnTo>
-                  <a:lnTo>
-                    <a:pt x="1432450" y="1763983"/>
-                  </a:lnTo>
-                  <a:lnTo>
-                    <a:pt x="1504073" y="1753835"/>
-                  </a:lnTo>
-                  <a:lnTo>
-                    <a:pt x="1575695" y="1743501"/>
-                  </a:lnTo>
-                  <a:lnTo>
-                    <a:pt x="1647318" y="1732979"/>
-                  </a:lnTo>
-                  <a:lnTo>
-                    <a:pt x="1718940" y="1722265"/>
-                  </a:lnTo>
-                  <a:lnTo>
-                    <a:pt x="1790563" y="1711356"/>
-                  </a:lnTo>
-                  <a:lnTo>
-                    <a:pt x="1862185" y="1700248"/>
-                  </a:lnTo>
-                  <a:lnTo>
-                    <a:pt x="1933808" y="1688937"/>
-                  </a:lnTo>
-                  <a:lnTo>
-                    <a:pt x="2005430" y="1677419"/>
-                  </a:lnTo>
-                  <a:lnTo>
-                    <a:pt x="2077053" y="1665692"/>
-                  </a:lnTo>
-                  <a:lnTo>
-                    <a:pt x="2148675" y="1653750"/>
-                  </a:lnTo>
-                  <a:lnTo>
-                    <a:pt x="2220298" y="1641591"/>
-                  </a:lnTo>
-                  <a:lnTo>
-                    <a:pt x="2291920" y="1629210"/>
-                  </a:lnTo>
-                  <a:lnTo>
-                    <a:pt x="2363543" y="1616603"/>
-                  </a:lnTo>
-                  <a:lnTo>
-                    <a:pt x="2435165" y="1603767"/>
-                  </a:lnTo>
-                  <a:lnTo>
-                    <a:pt x="2506788" y="1590696"/>
-                  </a:lnTo>
-                  <a:lnTo>
-                    <a:pt x="2578410" y="1577386"/>
-                  </a:lnTo>
-                  <a:lnTo>
-                    <a:pt x="2650033" y="1563834"/>
-                  </a:lnTo>
-                  <a:lnTo>
-                    <a:pt x="2721655" y="1550035"/>
-                  </a:lnTo>
-                  <a:lnTo>
-                    <a:pt x="2793278" y="1535984"/>
-                  </a:lnTo>
-                  <a:lnTo>
-                    <a:pt x="2864901" y="1521676"/>
-                  </a:lnTo>
-                  <a:lnTo>
-                    <a:pt x="2936523" y="1507108"/>
-                  </a:lnTo>
-                  <a:lnTo>
-                    <a:pt x="3008146" y="1492274"/>
-                  </a:lnTo>
-                  <a:lnTo>
-                    <a:pt x="3079768" y="1477169"/>
-                  </a:lnTo>
-                  <a:lnTo>
-                    <a:pt x="3151391" y="1461789"/>
-                  </a:lnTo>
-                  <a:lnTo>
-                    <a:pt x="3223013" y="1446128"/>
-                  </a:lnTo>
-                  <a:lnTo>
-                    <a:pt x="3294636" y="1430181"/>
-                  </a:lnTo>
-                  <a:lnTo>
-                    <a:pt x="3366258" y="1413944"/>
-                  </a:lnTo>
-                  <a:lnTo>
-                    <a:pt x="3437881" y="1397410"/>
-                  </a:lnTo>
-                  <a:lnTo>
-                    <a:pt x="3509503" y="1380575"/>
-                  </a:lnTo>
-                  <a:lnTo>
-                    <a:pt x="3581126" y="1363433"/>
-                  </a:lnTo>
-                  <a:lnTo>
-                    <a:pt x="3652748" y="1345978"/>
-                  </a:lnTo>
-                  <a:lnTo>
-                    <a:pt x="3724371" y="1328204"/>
-                  </a:lnTo>
-                  <a:lnTo>
-                    <a:pt x="3795993" y="1310107"/>
-                  </a:lnTo>
-                  <a:lnTo>
-                    <a:pt x="3867616" y="1291679"/>
-                  </a:lnTo>
-                  <a:lnTo>
-                    <a:pt x="3939238" y="1272915"/>
-                  </a:lnTo>
-                  <a:lnTo>
-                    <a:pt x="4010861" y="1253809"/>
-                  </a:lnTo>
-                  <a:lnTo>
-                    <a:pt x="4082483" y="1234354"/>
-                  </a:lnTo>
-                  <a:lnTo>
-                    <a:pt x="4154106" y="1214545"/>
-                  </a:lnTo>
-                  <a:lnTo>
-                    <a:pt x="4225729" y="1194374"/>
-                  </a:lnTo>
-                  <a:lnTo>
-                    <a:pt x="4297351" y="1173835"/>
-                  </a:lnTo>
-                  <a:lnTo>
-                    <a:pt x="4368974" y="1152921"/>
-                  </a:lnTo>
-                  <a:lnTo>
-                    <a:pt x="4440596" y="1131626"/>
-                  </a:lnTo>
-                  <a:lnTo>
-                    <a:pt x="4512219" y="1109943"/>
-                  </a:lnTo>
-                  <a:lnTo>
-                    <a:pt x="4583841" y="1087864"/>
-                  </a:lnTo>
-                  <a:lnTo>
-                    <a:pt x="4655464" y="1065382"/>
-                  </a:lnTo>
-                  <a:lnTo>
-                    <a:pt x="4727086" y="1042490"/>
-                  </a:lnTo>
-                  <a:lnTo>
-                    <a:pt x="4798709" y="1019181"/>
-                  </a:lnTo>
-                  <a:lnTo>
-                    <a:pt x="4870331" y="995446"/>
-                  </a:lnTo>
-                  <a:lnTo>
-                    <a:pt x="4941954" y="971279"/>
-                  </a:lnTo>
-                  <a:lnTo>
-                    <a:pt x="5013576" y="946670"/>
-                  </a:lnTo>
-                  <a:lnTo>
-                    <a:pt x="5085199" y="921613"/>
-                  </a:lnTo>
-                  <a:lnTo>
-                    <a:pt x="5156821" y="896098"/>
-                  </a:lnTo>
-                  <a:lnTo>
-                    <a:pt x="5228444" y="870119"/>
-                  </a:lnTo>
-                  <a:lnTo>
-                    <a:pt x="5300066" y="843665"/>
-                  </a:lnTo>
-                  <a:lnTo>
-                    <a:pt x="5371689" y="816729"/>
-                  </a:lnTo>
-                  <a:lnTo>
-                    <a:pt x="5443311" y="789301"/>
-                  </a:lnTo>
-                  <a:lnTo>
-                    <a:pt x="5514934" y="761373"/>
-                  </a:lnTo>
-                  <a:lnTo>
-                    <a:pt x="5586557" y="732936"/>
-                  </a:lnTo>
-                  <a:lnTo>
-                    <a:pt x="5658179" y="703979"/>
-                  </a:lnTo>
-                  <a:lnTo>
-                    <a:pt x="5729802" y="674495"/>
-                  </a:lnTo>
-                  <a:lnTo>
-                    <a:pt x="5801424" y="644473"/>
-                  </a:lnTo>
-                  <a:lnTo>
-                    <a:pt x="5873047" y="613903"/>
-                  </a:lnTo>
-                  <a:lnTo>
-                    <a:pt x="5944669" y="582776"/>
-                  </a:lnTo>
-                  <a:lnTo>
-                    <a:pt x="6016292" y="551080"/>
-                  </a:lnTo>
-                  <a:lnTo>
-                    <a:pt x="6087914" y="518807"/>
-                  </a:lnTo>
-                  <a:lnTo>
-                    <a:pt x="6159537" y="485945"/>
-                  </a:lnTo>
-                  <a:lnTo>
-                    <a:pt x="6231159" y="452483"/>
-                  </a:lnTo>
-                  <a:lnTo>
-                    <a:pt x="6302782" y="418411"/>
-                  </a:lnTo>
-                  <a:lnTo>
-                    <a:pt x="6374404" y="383718"/>
-                  </a:lnTo>
-                  <a:lnTo>
-                    <a:pt x="6446027" y="348391"/>
-                  </a:lnTo>
-                  <a:lnTo>
-                    <a:pt x="6517649" y="312421"/>
-                  </a:lnTo>
-                  <a:lnTo>
-                    <a:pt x="6589272" y="275794"/>
-                  </a:lnTo>
-                  <a:lnTo>
-                    <a:pt x="6660894" y="238499"/>
-                  </a:lnTo>
-                  <a:lnTo>
-                    <a:pt x="6732517" y="200523"/>
-                  </a:lnTo>
-                  <a:lnTo>
-                    <a:pt x="6804139" y="161855"/>
-                  </a:lnTo>
-                  <a:lnTo>
-                    <a:pt x="6875762" y="122482"/>
-                  </a:lnTo>
-                  <a:lnTo>
-                    <a:pt x="6947385" y="82390"/>
-                  </a:lnTo>
-                  <a:lnTo>
-                    <a:pt x="7019007" y="41567"/>
+                    <a:pt x="71622" y="1948237"/>
+                  </a:lnTo>
+                  <a:lnTo>
+                    <a:pt x="143245" y="1940963"/>
+                  </a:lnTo>
+                  <a:lnTo>
+                    <a:pt x="214867" y="1933556"/>
+                  </a:lnTo>
+                  <a:lnTo>
+                    <a:pt x="286490" y="1926014"/>
+                  </a:lnTo>
+                  <a:lnTo>
+                    <a:pt x="358112" y="1918334"/>
+                  </a:lnTo>
+                  <a:lnTo>
+                    <a:pt x="429735" y="1910514"/>
+                  </a:lnTo>
+                  <a:lnTo>
+                    <a:pt x="501357" y="1902551"/>
+                  </a:lnTo>
+                  <a:lnTo>
+                    <a:pt x="572980" y="1894443"/>
+                  </a:lnTo>
+                  <a:lnTo>
+                    <a:pt x="644602" y="1886187"/>
+                  </a:lnTo>
+                  <a:lnTo>
+                    <a:pt x="716225" y="1877780"/>
+                  </a:lnTo>
+                  <a:lnTo>
+                    <a:pt x="787847" y="1869219"/>
+                  </a:lnTo>
+                  <a:lnTo>
+                    <a:pt x="859470" y="1860502"/>
+                  </a:lnTo>
+                  <a:lnTo>
+                    <a:pt x="931092" y="1851626"/>
+                  </a:lnTo>
+                  <a:lnTo>
+                    <a:pt x="1002715" y="1842588"/>
+                  </a:lnTo>
+                  <a:lnTo>
+                    <a:pt x="1074337" y="1833385"/>
+                  </a:lnTo>
+                  <a:lnTo>
+                    <a:pt x="1145960" y="1824013"/>
+                  </a:lnTo>
+                  <a:lnTo>
+                    <a:pt x="1217582" y="1814471"/>
+                  </a:lnTo>
+                  <a:lnTo>
+                    <a:pt x="1289205" y="1804754"/>
+                  </a:lnTo>
+                  <a:lnTo>
+                    <a:pt x="1360827" y="1794860"/>
+                  </a:lnTo>
+                  <a:lnTo>
+                    <a:pt x="1432450" y="1784785"/>
+                  </a:lnTo>
+                  <a:lnTo>
+                    <a:pt x="1504073" y="1774527"/>
+                  </a:lnTo>
+                  <a:lnTo>
+                    <a:pt x="1575695" y="1764080"/>
+                  </a:lnTo>
+                  <a:lnTo>
+                    <a:pt x="1647318" y="1753444"/>
+                  </a:lnTo>
+                  <a:lnTo>
+                    <a:pt x="1718940" y="1742613"/>
+                  </a:lnTo>
+                  <a:lnTo>
+                    <a:pt x="1790563" y="1731584"/>
+                  </a:lnTo>
+                  <a:lnTo>
+                    <a:pt x="1862185" y="1720353"/>
+                  </a:lnTo>
+                  <a:lnTo>
+                    <a:pt x="1933808" y="1708918"/>
+                  </a:lnTo>
+                  <a:lnTo>
+                    <a:pt x="2005430" y="1697274"/>
+                  </a:lnTo>
+                  <a:lnTo>
+                    <a:pt x="2077053" y="1685417"/>
+                  </a:lnTo>
+                  <a:lnTo>
+                    <a:pt x="2148675" y="1673344"/>
+                  </a:lnTo>
+                  <a:lnTo>
+                    <a:pt x="2220298" y="1661050"/>
+                  </a:lnTo>
+                  <a:lnTo>
+                    <a:pt x="2291920" y="1648532"/>
+                  </a:lnTo>
+                  <a:lnTo>
+                    <a:pt x="2363543" y="1635785"/>
+                  </a:lnTo>
+                  <a:lnTo>
+                    <a:pt x="2435165" y="1622806"/>
+                  </a:lnTo>
+                  <a:lnTo>
+                    <a:pt x="2506788" y="1609589"/>
+                  </a:lnTo>
+                  <a:lnTo>
+                    <a:pt x="2578410" y="1596131"/>
+                  </a:lnTo>
+                  <a:lnTo>
+                    <a:pt x="2650033" y="1582428"/>
+                  </a:lnTo>
+                  <a:lnTo>
+                    <a:pt x="2721655" y="1568474"/>
+                  </a:lnTo>
+                  <a:lnTo>
+                    <a:pt x="2793278" y="1554265"/>
+                  </a:lnTo>
+                  <a:lnTo>
+                    <a:pt x="2864901" y="1539797"/>
+                  </a:lnTo>
+                  <a:lnTo>
+                    <a:pt x="2936523" y="1525064"/>
+                  </a:lnTo>
+                  <a:lnTo>
+                    <a:pt x="3008146" y="1510063"/>
+                  </a:lnTo>
+                  <a:lnTo>
+                    <a:pt x="3079768" y="1494788"/>
+                  </a:lnTo>
+                  <a:lnTo>
+                    <a:pt x="3151391" y="1479233"/>
+                  </a:lnTo>
+                  <a:lnTo>
+                    <a:pt x="3223013" y="1463395"/>
+                  </a:lnTo>
+                  <a:lnTo>
+                    <a:pt x="3294636" y="1447267"/>
+                  </a:lnTo>
+                  <a:lnTo>
+                    <a:pt x="3366258" y="1430845"/>
+                  </a:lnTo>
+                  <a:lnTo>
+                    <a:pt x="3437881" y="1414123"/>
+                  </a:lnTo>
+                  <a:lnTo>
+                    <a:pt x="3509503" y="1397096"/>
+                  </a:lnTo>
+                  <a:lnTo>
+                    <a:pt x="3581126" y="1379758"/>
+                  </a:lnTo>
+                  <a:lnTo>
+                    <a:pt x="3652748" y="1362103"/>
+                  </a:lnTo>
+                  <a:lnTo>
+                    <a:pt x="3724371" y="1344126"/>
+                  </a:lnTo>
+                  <a:lnTo>
+                    <a:pt x="3795993" y="1325821"/>
+                  </a:lnTo>
+                  <a:lnTo>
+                    <a:pt x="3867616" y="1307181"/>
+                  </a:lnTo>
+                  <a:lnTo>
+                    <a:pt x="3939238" y="1288201"/>
+                  </a:lnTo>
+                  <a:lnTo>
+                    <a:pt x="4010861" y="1268874"/>
+                  </a:lnTo>
+                  <a:lnTo>
+                    <a:pt x="4082483" y="1249194"/>
+                  </a:lnTo>
+                  <a:lnTo>
+                    <a:pt x="4154106" y="1229155"/>
+                  </a:lnTo>
+                  <a:lnTo>
+                    <a:pt x="4225729" y="1208751"/>
+                  </a:lnTo>
+                  <a:lnTo>
+                    <a:pt x="4297351" y="1187973"/>
+                  </a:lnTo>
+                  <a:lnTo>
+                    <a:pt x="4368974" y="1166816"/>
+                  </a:lnTo>
+                  <a:lnTo>
+                    <a:pt x="4440596" y="1145273"/>
+                  </a:lnTo>
+                  <a:lnTo>
+                    <a:pt x="4512219" y="1123336"/>
+                  </a:lnTo>
+                  <a:lnTo>
+                    <a:pt x="4583841" y="1100999"/>
+                  </a:lnTo>
+                  <a:lnTo>
+                    <a:pt x="4655464" y="1078254"/>
+                  </a:lnTo>
+                  <a:lnTo>
+                    <a:pt x="4727086" y="1055094"/>
+                  </a:lnTo>
+                  <a:lnTo>
+                    <a:pt x="4798709" y="1031510"/>
+                  </a:lnTo>
+                  <a:lnTo>
+                    <a:pt x="4870331" y="1007496"/>
+                  </a:lnTo>
+                  <a:lnTo>
+                    <a:pt x="4941954" y="983044"/>
+                  </a:lnTo>
+                  <a:lnTo>
+                    <a:pt x="5013576" y="958145"/>
+                  </a:lnTo>
+                  <a:lnTo>
+                    <a:pt x="5085199" y="932791"/>
+                  </a:lnTo>
+                  <a:lnTo>
+                    <a:pt x="5156821" y="906974"/>
+                  </a:lnTo>
+                  <a:lnTo>
+                    <a:pt x="5228444" y="880686"/>
+                  </a:lnTo>
+                  <a:lnTo>
+                    <a:pt x="5300066" y="853918"/>
+                  </a:lnTo>
+                  <a:lnTo>
+                    <a:pt x="5371689" y="826661"/>
+                  </a:lnTo>
+                  <a:lnTo>
+                    <a:pt x="5443311" y="798906"/>
+                  </a:lnTo>
+                  <a:lnTo>
+                    <a:pt x="5514934" y="770645"/>
+                  </a:lnTo>
+                  <a:lnTo>
+                    <a:pt x="5586557" y="741867"/>
+                  </a:lnTo>
+                  <a:lnTo>
+                    <a:pt x="5658179" y="712564"/>
+                  </a:lnTo>
+                  <a:lnTo>
+                    <a:pt x="5729802" y="682726"/>
+                  </a:lnTo>
+                  <a:lnTo>
+                    <a:pt x="5801424" y="652343"/>
+                  </a:lnTo>
+                  <a:lnTo>
+                    <a:pt x="5873047" y="621405"/>
+                  </a:lnTo>
+                  <a:lnTo>
+                    <a:pt x="5944669" y="589902"/>
+                  </a:lnTo>
+                  <a:lnTo>
+                    <a:pt x="6016292" y="557824"/>
+                  </a:lnTo>
+                  <a:lnTo>
+                    <a:pt x="6087914" y="525160"/>
+                  </a:lnTo>
+                  <a:lnTo>
+                    <a:pt x="6159537" y="491900"/>
+                  </a:lnTo>
+                  <a:lnTo>
+                    <a:pt x="6231159" y="458032"/>
+                  </a:lnTo>
+                  <a:lnTo>
+                    <a:pt x="6302782" y="423546"/>
+                  </a:lnTo>
+                  <a:lnTo>
+                    <a:pt x="6374404" y="388430"/>
+                  </a:lnTo>
+                  <a:lnTo>
+                    <a:pt x="6446027" y="352673"/>
+                  </a:lnTo>
+                  <a:lnTo>
+                    <a:pt x="6517649" y="316263"/>
+                  </a:lnTo>
+                  <a:lnTo>
+                    <a:pt x="6589272" y="279188"/>
+                  </a:lnTo>
+                  <a:lnTo>
+                    <a:pt x="6660894" y="241436"/>
+                  </a:lnTo>
+                  <a:lnTo>
+                    <a:pt x="6732517" y="202995"/>
+                  </a:lnTo>
+                  <a:lnTo>
+                    <a:pt x="6804139" y="163852"/>
+                  </a:lnTo>
+                  <a:lnTo>
+                    <a:pt x="6875762" y="123994"/>
+                  </a:lnTo>
+                  <a:lnTo>
+                    <a:pt x="6947385" y="83408"/>
+                  </a:lnTo>
+                  <a:lnTo>
+                    <a:pt x="7019007" y="42081"/>
                   </a:lnTo>
                   <a:lnTo>
                     <a:pt x="7090630" y="0"/>
@@ -4446,7 +4440,7 @@
           </p:nvSpPr>
           <p:spPr>
             <a:xfrm>
-              <a:off x="4374536" y="1896563"/>
+              <a:off x="4334057" y="1896563"/>
               <a:ext cx="0" cy="3826579"/>
             </a:xfrm>
             <a:custGeom>
@@ -4719,7 +4713,7 @@
           </p:nvSpPr>
           <p:spPr>
             <a:xfrm>
-              <a:off x="2009531" y="5785772"/>
+              <a:off x="2008892" y="5785772"/>
               <a:ext cx="223753" cy="80101"/>
             </a:xfrm>
             <a:prstGeom prst="rect">
@@ -4765,7 +4759,7 @@
           </p:nvSpPr>
           <p:spPr>
             <a:xfrm>
-              <a:off x="4372762" y="5785772"/>
+              <a:off x="4369739" y="5785772"/>
               <a:ext cx="62179" cy="80101"/>
             </a:xfrm>
             <a:prstGeom prst="rect">
@@ -4811,7 +4805,7 @@
           </p:nvSpPr>
           <p:spPr>
             <a:xfrm>
-              <a:off x="6593026" y="5785772"/>
+              <a:off x="6587619" y="5785772"/>
               <a:ext cx="186537" cy="80101"/>
             </a:xfrm>
             <a:prstGeom prst="rect">
